--- a/AdmitRoute_Presentation.pptx
+++ b/AdmitRoute_Presentation.pptx
@@ -14,6 +14,7 @@
     <p:sldId id="262" r:id="rId13"/>
     <p:sldId id="263" r:id="rId14"/>
     <p:sldId id="264" r:id="rId15"/>
+    <p:sldId id="265" r:id="rId16"/>
   </p:sldIdLst>
   <p:sldSz cx="12191695" cy="6858000" type="screen4x3"/>
   <p:notesSz cx="6858000" cy="9144000"/>
@@ -3155,7 +3156,7 @@
         </p:blipFill>
         <p:spPr>
           <a:xfrm>
-            <a:off x="822960" y="1005840"/>
+            <a:off x="822960" y="822960"/>
             <a:ext cx="1645920" cy="1645920"/>
           </a:xfrm>
           <a:prstGeom prst="rect">
@@ -3171,8 +3172,8 @@
         </p:nvSpPr>
         <p:spPr>
           <a:xfrm>
-            <a:off x="822960" y="2926080"/>
-            <a:ext cx="2926080" cy="384048"/>
+            <a:off x="822960" y="2743200"/>
+            <a:ext cx="3108960" cy="384048"/>
           </a:xfrm>
           <a:prstGeom prst="roundRect">
             <a:avLst/>
@@ -3213,7 +3214,7 @@
               </a:defRPr>
             </a:pPr>
             <a:r>
-              <a:t>AI-EDTECH PLATFORM 2026</a:t>
+              <a:t>LOCUS HACKATHON 2026 • КЕЙС 02</a:t>
             </a:r>
           </a:p>
         </p:txBody>
@@ -3226,7 +3227,7 @@
         </p:nvSpPr>
         <p:spPr>
           <a:xfrm>
-            <a:off x="822960" y="3474720"/>
+            <a:off x="822960" y="3291840"/>
             <a:ext cx="10515600" cy="1463040"/>
           </a:xfrm>
           <a:prstGeom prst="rect">
@@ -3241,7 +3242,7 @@
           <a:lstStyle/>
           <a:p>
             <a:pPr>
-              <a:defRPr sz="5400" b="1">
+              <a:defRPr sz="5000" b="1">
                 <a:solidFill>
                   <a:srgbClr val="FFFFFF"/>
                 </a:solidFill>
@@ -3255,9 +3256,9 @@
           <a:p>
             <a:pPr>
               <a:spcBef>
-                <a:spcPts val="1000"/>
-              </a:spcBef>
-              <a:defRPr sz="2000">
+                <a:spcPts val="600"/>
+              </a:spcBef>
+              <a:defRPr sz="1800">
                 <a:solidFill>
                   <a:srgbClr val="94A3B8"/>
                 </a:solidFill>
@@ -3278,7 +3279,7 @@
         </p:nvSpPr>
         <p:spPr>
           <a:xfrm>
-            <a:off x="822960" y="5120640"/>
+            <a:off x="822960" y="5029200"/>
             <a:ext cx="5029200" cy="457200"/>
           </a:xfrm>
           <a:prstGeom prst="rect">
@@ -3293,7 +3294,7 @@
           <a:lstStyle/>
           <a:p>
             <a:pPr>
-              <a:defRPr sz="1300" b="1">
+              <a:defRPr sz="1200" b="1">
                 <a:solidFill>
                   <a:srgbClr val="E2E8F0"/>
                 </a:solidFill>
@@ -3301,7 +3302,7 @@
               </a:defRPr>
             </a:pPr>
             <a:r>
-              <a:t>✓ Защита от иллюзий: честный процент</a:t>
+              <a:t>✓ Алгоритм «Анти-иллюзия»: защита от ложных надежд и отказа</a:t>
             </a:r>
           </a:p>
         </p:txBody>
@@ -3314,7 +3315,7 @@
         </p:nvSpPr>
         <p:spPr>
           <a:xfrm>
-            <a:off x="6126480" y="5120640"/>
+            <a:off x="6126480" y="5029200"/>
             <a:ext cx="5029200" cy="457200"/>
           </a:xfrm>
           <a:prstGeom prst="rect">
@@ -3329,7 +3330,7 @@
           <a:lstStyle/>
           <a:p>
             <a:pPr>
-              <a:defRPr sz="1300" b="1">
+              <a:defRPr sz="1200" b="1">
                 <a:solidFill>
                   <a:srgbClr val="E2E8F0"/>
                 </a:solidFill>
@@ -3337,7 +3338,7 @@
               </a:defRPr>
             </a:pPr>
             <a:r>
-              <a:t>✓ 36+ детальных вузов (KZ, Азия, Европа)</a:t>
+              <a:t>✓ 36+ детальных программ + живой AI-поиск любого вуза планеты</a:t>
             </a:r>
           </a:p>
         </p:txBody>
@@ -3350,7 +3351,7 @@
         </p:nvSpPr>
         <p:spPr>
           <a:xfrm>
-            <a:off x="822960" y="5760720"/>
+            <a:off x="822960" y="5669280"/>
             <a:ext cx="5029200" cy="457200"/>
           </a:xfrm>
           <a:prstGeom prst="rect">
@@ -3365,7 +3366,7 @@
           <a:lstStyle/>
           <a:p>
             <a:pPr>
-              <a:defRPr sz="1300" b="1">
+              <a:defRPr sz="1200" b="1">
                 <a:solidFill>
                   <a:srgbClr val="E2E8F0"/>
                 </a:solidFill>
@@ -3373,7 +3374,7 @@
               </a:defRPr>
             </a:pPr>
             <a:r>
-              <a:t>✓ Поиск любого вуза через Gemini 3.6 Flash</a:t>
+              <a:t>✓ Персональный роадмап дедлайнов, экспорт в iCal и Telegram-бот</a:t>
             </a:r>
           </a:p>
         </p:txBody>
@@ -3386,7 +3387,7 @@
         </p:nvSpPr>
         <p:spPr>
           <a:xfrm>
-            <a:off x="6126480" y="5760720"/>
+            <a:off x="6126480" y="5669280"/>
             <a:ext cx="5029200" cy="457200"/>
           </a:xfrm>
           <a:prstGeom prst="rect">
@@ -3401,7 +3402,7 @@
           <a:lstStyle/>
           <a:p>
             <a:pPr>
-              <a:defRPr sz="1300" b="1">
+              <a:defRPr sz="1200" b="1">
                 <a:solidFill>
                   <a:srgbClr val="E2E8F0"/>
                 </a:solidFill>
@@ -3409,7 +3410,405 @@
               </a:defRPr>
             </a:pPr>
             <a:r>
-              <a:t>✓ 3 волны дедлайнов и статистика грантов</a:t>
+              <a:t>✓ Доступность для каждой семьи: 4 990 ₸ вместо $2,000 в агентствах</a:t>
+            </a:r>
+          </a:p>
+        </p:txBody>
+      </p:sp>
+    </p:spTree>
+  </p:cSld>
+  <p:clrMapOvr>
+    <a:masterClrMapping/>
+  </p:clrMapOvr>
+</p:sld>
+</file>
+
+<file path=ppt/slides/slide10.xml><?xml version="1.0" encoding="utf-8"?>
+<p:sld xmlns:a="http://schemas.openxmlformats.org/drawingml/2006/main" xmlns:p="http://schemas.openxmlformats.org/presentationml/2006/main" xmlns:r="http://schemas.openxmlformats.org/officeDocument/2006/relationships">
+  <p:cSld>
+    <p:spTree>
+      <p:nvGrpSpPr>
+        <p:cNvPr id="1" name=""/>
+        <p:cNvGrpSpPr/>
+        <p:nvPr/>
+      </p:nvGrpSpPr>
+      <p:grpSpPr/>
+      <p:sp>
+        <p:nvSpPr>
+          <p:cNvPr id="2" name="Rectangle 1"/>
+          <p:cNvSpPr/>
+          <p:nvPr/>
+        </p:nvSpPr>
+        <p:spPr>
+          <a:xfrm>
+            <a:off x="0" y="0"/>
+            <a:ext cx="12191695" cy="6858000"/>
+          </a:xfrm>
+          <a:prstGeom prst="rect">
+            <a:avLst/>
+          </a:prstGeom>
+          <a:solidFill>
+            <a:srgbClr val="0F172A"/>
+          </a:solidFill>
+          <a:ln>
+            <a:noFill/>
+          </a:ln>
+        </p:spPr>
+        <p:style>
+          <a:lnRef idx="1">
+            <a:schemeClr val="accent1"/>
+          </a:lnRef>
+          <a:fillRef idx="3">
+            <a:schemeClr val="accent1"/>
+          </a:fillRef>
+          <a:effectRef idx="2">
+            <a:schemeClr val="accent1"/>
+          </a:effectRef>
+          <a:fontRef idx="minor">
+            <a:schemeClr val="lt1"/>
+          </a:fontRef>
+        </p:style>
+        <p:txBody>
+          <a:bodyPr rtlCol="0" anchor="ctr"/>
+          <a:lstStyle/>
+          <a:p>
+            <a:pPr algn="ctr"/>
+          </a:p>
+        </p:txBody>
+      </p:sp>
+      <p:pic>
+        <p:nvPicPr>
+          <p:cNvPr id="3" name="Picture 2" descr="admitroute_line_logo_1789549104894.jpg"/>
+          <p:cNvPicPr>
+            <a:picLocks noChangeAspect="1"/>
+          </p:cNvPicPr>
+          <p:nvPr/>
+        </p:nvPicPr>
+        <p:blipFill>
+          <a:blip r:embed="rId2"/>
+          <a:stretch>
+            <a:fillRect/>
+          </a:stretch>
+        </p:blipFill>
+        <p:spPr>
+          <a:xfrm>
+            <a:off x="822960" y="822960"/>
+            <a:ext cx="1371600" cy="1371600"/>
+          </a:xfrm>
+          <a:prstGeom prst="rect">
+            <a:avLst/>
+          </a:prstGeom>
+        </p:spPr>
+      </p:pic>
+      <p:sp>
+        <p:nvSpPr>
+          <p:cNvPr id="4" name="TextBox 3"/>
+          <p:cNvSpPr txBox="1"/>
+          <p:nvPr/>
+        </p:nvSpPr>
+        <p:spPr>
+          <a:xfrm>
+            <a:off x="822960" y="2194560"/>
+            <a:ext cx="10515600" cy="1645920"/>
+          </a:xfrm>
+          <a:prstGeom prst="rect">
+            <a:avLst/>
+          </a:prstGeom>
+          <a:noFill/>
+        </p:spPr>
+        <p:txBody>
+          <a:bodyPr wrap="square">
+            <a:spAutoFit/>
+          </a:bodyPr>
+          <a:lstStyle/>
+          <a:p>
+            <a:pPr>
+              <a:defRPr sz="3600" b="1">
+                <a:solidFill>
+                  <a:srgbClr val="FFFFFF"/>
+                </a:solidFill>
+                <a:latin typeface="Arial"/>
+              </a:defRPr>
+            </a:pPr>
+            <a:r>
+              <a:t>AdmitRoute: Поступление без стресса и иллюзий</a:t>
+            </a:r>
+          </a:p>
+          <a:p>
+            <a:pPr>
+              <a:spcBef>
+                <a:spcPts val="800"/>
+              </a:spcBef>
+              <a:defRPr sz="1500">
+                <a:solidFill>
+                  <a:srgbClr val="94A3B8"/>
+                </a:solidFill>
+                <a:latin typeface="Arial"/>
+              </a:defRPr>
+            </a:pPr>
+            <a:r>
+              <a:t>Проект создан в рамках LOCUS Startup Hackathon 2026 (Кейс 02: Персональный маршрут поступления, код LOCUSCASE2).</a:t>
+            </a:r>
+          </a:p>
+        </p:txBody>
+      </p:sp>
+      <p:sp>
+        <p:nvSpPr>
+          <p:cNvPr id="5" name="Rounded Rectangle 4"/>
+          <p:cNvSpPr/>
+          <p:nvPr/>
+        </p:nvSpPr>
+        <p:spPr>
+          <a:xfrm>
+            <a:off x="822960" y="4114800"/>
+            <a:ext cx="3383280" cy="2011680"/>
+          </a:xfrm>
+          <a:prstGeom prst="roundRect">
+            <a:avLst/>
+          </a:prstGeom>
+          <a:solidFill>
+            <a:srgbClr val="1E293B"/>
+          </a:solidFill>
+          <a:ln>
+            <a:solidFill>
+              <a:srgbClr val="334155"/>
+            </a:solidFill>
+          </a:ln>
+        </p:spPr>
+        <p:style>
+          <a:lnRef idx="1">
+            <a:schemeClr val="accent1"/>
+          </a:lnRef>
+          <a:fillRef idx="3">
+            <a:schemeClr val="accent1"/>
+          </a:fillRef>
+          <a:effectRef idx="2">
+            <a:schemeClr val="accent1"/>
+          </a:effectRef>
+          <a:fontRef idx="minor">
+            <a:schemeClr val="lt1"/>
+          </a:fontRef>
+        </p:style>
+        <p:txBody>
+          <a:bodyPr rtlCol="0" anchor="ctr" wrap="square" lIns="228600" rIns="228600" tIns="228600"/>
+          <a:lstStyle/>
+          <a:p>
+            <a:pPr algn="ctr">
+              <a:defRPr sz="1000" b="1">
+                <a:solidFill>
+                  <a:srgbClr val="38BDF8"/>
+                </a:solidFill>
+                <a:latin typeface="Arial"/>
+              </a:defRPr>
+            </a:pPr>
+            <a:r>
+              <a:t>ОСНОВАТЕЛЬ И РАЗРАБОТКА</a:t>
+            </a:r>
+          </a:p>
+          <a:p>
+            <a:pPr>
+              <a:spcBef>
+                <a:spcPts val="600"/>
+              </a:spcBef>
+              <a:defRPr sz="1600" b="1">
+                <a:solidFill>
+                  <a:srgbClr val="FFFFFF"/>
+                </a:solidFill>
+                <a:latin typeface="Arial"/>
+              </a:defRPr>
+            </a:pPr>
+            <a:r>
+              <a:t>Адильхан</a:t>
+            </a:r>
+          </a:p>
+          <a:p>
+            <a:pPr>
+              <a:spcBef>
+                <a:spcPts val="400"/>
+              </a:spcBef>
+              <a:defRPr sz="1100">
+                <a:solidFill>
+                  <a:srgbClr val="94A3B8"/>
+                </a:solidFill>
+                <a:latin typeface="Arial"/>
+              </a:defRPr>
+            </a:pPr>
+            <a:r>
+              <a:t>Product &amp; Engineering</a:t>
+            </a:r>
+          </a:p>
+        </p:txBody>
+      </p:sp>
+      <p:sp>
+        <p:nvSpPr>
+          <p:cNvPr id="6" name="Rounded Rectangle 5"/>
+          <p:cNvSpPr/>
+          <p:nvPr/>
+        </p:nvSpPr>
+        <p:spPr>
+          <a:xfrm>
+            <a:off x="4480560" y="4114800"/>
+            <a:ext cx="3383280" cy="2011680"/>
+          </a:xfrm>
+          <a:prstGeom prst="roundRect">
+            <a:avLst/>
+          </a:prstGeom>
+          <a:solidFill>
+            <a:srgbClr val="1E293B"/>
+          </a:solidFill>
+          <a:ln>
+            <a:solidFill>
+              <a:srgbClr val="334155"/>
+            </a:solidFill>
+          </a:ln>
+        </p:spPr>
+        <p:style>
+          <a:lnRef idx="1">
+            <a:schemeClr val="accent1"/>
+          </a:lnRef>
+          <a:fillRef idx="3">
+            <a:schemeClr val="accent1"/>
+          </a:fillRef>
+          <a:effectRef idx="2">
+            <a:schemeClr val="accent1"/>
+          </a:effectRef>
+          <a:fontRef idx="minor">
+            <a:schemeClr val="lt1"/>
+          </a:fontRef>
+        </p:style>
+        <p:txBody>
+          <a:bodyPr rtlCol="0" anchor="ctr" wrap="square" lIns="228600" rIns="228600" tIns="228600"/>
+          <a:lstStyle/>
+          <a:p>
+            <a:pPr algn="ctr">
+              <a:defRPr sz="1000" b="1">
+                <a:solidFill>
+                  <a:srgbClr val="38BDF8"/>
+                </a:solidFill>
+                <a:latin typeface="Arial"/>
+              </a:defRPr>
+            </a:pPr>
+            <a:r>
+              <a:t>WHATSAPP / ТЕЛЕФОН</a:t>
+            </a:r>
+          </a:p>
+          <a:p>
+            <a:pPr>
+              <a:spcBef>
+                <a:spcPts val="600"/>
+              </a:spcBef>
+              <a:defRPr sz="1600" b="1">
+                <a:solidFill>
+                  <a:srgbClr val="FFFFFF"/>
+                </a:solidFill>
+                <a:latin typeface="Arial"/>
+              </a:defRPr>
+            </a:pPr>
+            <a:r>
+              <a:t>+7 775 253 01 10</a:t>
+            </a:r>
+          </a:p>
+          <a:p>
+            <a:pPr>
+              <a:spcBef>
+                <a:spcPts val="400"/>
+              </a:spcBef>
+              <a:defRPr sz="1100">
+                <a:solidFill>
+                  <a:srgbClr val="94A3B8"/>
+                </a:solidFill>
+                <a:latin typeface="Arial"/>
+              </a:defRPr>
+            </a:pPr>
+            <a:r>
+              <a:t>Прямая связь и оформление PRO</a:t>
+            </a:r>
+          </a:p>
+        </p:txBody>
+      </p:sp>
+      <p:sp>
+        <p:nvSpPr>
+          <p:cNvPr id="7" name="Rounded Rectangle 6"/>
+          <p:cNvSpPr/>
+          <p:nvPr/>
+        </p:nvSpPr>
+        <p:spPr>
+          <a:xfrm>
+            <a:off x="8138160" y="4114800"/>
+            <a:ext cx="3383280" cy="2011680"/>
+          </a:xfrm>
+          <a:prstGeom prst="roundRect">
+            <a:avLst/>
+          </a:prstGeom>
+          <a:solidFill>
+            <a:srgbClr val="1E293B"/>
+          </a:solidFill>
+          <a:ln>
+            <a:solidFill>
+              <a:srgbClr val="334155"/>
+            </a:solidFill>
+          </a:ln>
+        </p:spPr>
+        <p:style>
+          <a:lnRef idx="1">
+            <a:schemeClr val="accent1"/>
+          </a:lnRef>
+          <a:fillRef idx="3">
+            <a:schemeClr val="accent1"/>
+          </a:fillRef>
+          <a:effectRef idx="2">
+            <a:schemeClr val="accent1"/>
+          </a:effectRef>
+          <a:fontRef idx="minor">
+            <a:schemeClr val="lt1"/>
+          </a:fontRef>
+        </p:style>
+        <p:txBody>
+          <a:bodyPr rtlCol="0" anchor="ctr" wrap="square" lIns="228600" rIns="228600" tIns="228600"/>
+          <a:lstStyle/>
+          <a:p>
+            <a:pPr algn="ctr">
+              <a:defRPr sz="1000" b="1">
+                <a:solidFill>
+                  <a:srgbClr val="38BDF8"/>
+                </a:solidFill>
+                <a:latin typeface="Arial"/>
+              </a:defRPr>
+            </a:pPr>
+            <a:r>
+              <a:t>TELEGRAM</a:t>
+            </a:r>
+          </a:p>
+          <a:p>
+            <a:pPr>
+              <a:spcBef>
+                <a:spcPts val="600"/>
+              </a:spcBef>
+              <a:defRPr sz="1600" b="1">
+                <a:solidFill>
+                  <a:srgbClr val="FFFFFF"/>
+                </a:solidFill>
+                <a:latin typeface="Arial"/>
+              </a:defRPr>
+            </a:pPr>
+            <a:r>
+              <a:t>@nftkoroi</a:t>
+            </a:r>
+          </a:p>
+          <a:p>
+            <a:pPr>
+              <a:spcBef>
+                <a:spcPts val="400"/>
+              </a:spcBef>
+              <a:defRPr sz="1100">
+                <a:solidFill>
+                  <a:srgbClr val="94A3B8"/>
+                </a:solidFill>
+                <a:latin typeface="Arial"/>
+              </a:defRPr>
+            </a:pPr>
+            <a:r>
+              <a:t>Оперативные ответы в мессенджере</a:t>
             </a:r>
           </a:p>
         </p:txBody>
@@ -3483,8 +3882,8 @@
         </p:nvSpPr>
         <p:spPr>
           <a:xfrm>
-            <a:off x="731520" y="457200"/>
-            <a:ext cx="10515600" cy="320040"/>
+            <a:off x="731520" y="411480"/>
+            <a:ext cx="10698480" cy="292608"/>
           </a:xfrm>
           <a:prstGeom prst="rect">
             <a:avLst/>
@@ -3506,7 +3905,7 @@
               </a:defRPr>
             </a:pPr>
             <a:r>
-              <a:t>ПРОБЛЕМА РЫНКА</a:t>
+              <a:t>1. ПРОБЛЕМА РЫНКА</a:t>
             </a:r>
           </a:p>
         </p:txBody>
@@ -3519,8 +3918,8 @@
         </p:nvSpPr>
         <p:spPr>
           <a:xfrm>
-            <a:off x="731520" y="777240"/>
-            <a:ext cx="10515600" cy="548640"/>
+            <a:off x="731520" y="731520"/>
+            <a:ext cx="10698480" cy="502920"/>
           </a:xfrm>
           <a:prstGeom prst="rect">
             <a:avLst/>
@@ -3534,7 +3933,7 @@
           <a:lstStyle/>
           <a:p>
             <a:pPr>
-              <a:defRPr sz="2400" b="1">
+              <a:defRPr sz="2200" b="1">
                 <a:solidFill>
                   <a:srgbClr val="0F172A"/>
                 </a:solidFill>
@@ -3542,7 +3941,7 @@
               </a:defRPr>
             </a:pPr>
             <a:r>
-              <a:t>С чем сталкивается каждый абитуриент и родитель?</a:t>
+              <a:t>С чем сталкивается абитуриент и его семья?</a:t>
             </a:r>
           </a:p>
         </p:txBody>
@@ -3555,8 +3954,8 @@
         </p:nvSpPr>
         <p:spPr>
           <a:xfrm>
-            <a:off x="731520" y="1325880"/>
-            <a:ext cx="10515600" cy="365760"/>
+            <a:off x="731520" y="1261872"/>
+            <a:ext cx="10698480" cy="365760"/>
           </a:xfrm>
           <a:prstGeom prst="rect">
             <a:avLst/>
@@ -3570,7 +3969,7 @@
           <a:lstStyle/>
           <a:p>
             <a:pPr>
-              <a:defRPr sz="1300">
+              <a:defRPr sz="1200">
                 <a:solidFill>
                   <a:srgbClr val="64748B"/>
                 </a:solidFill>
@@ -3578,7 +3977,7 @@
               </a:defRPr>
             </a:pPr>
             <a:r>
-              <a:t>Поступление в вуз сегодня сопряжено с колоссальным стрессом, непрозрачностью и финансовыми рисками.</a:t>
+              <a:t>Поступление в университет сопряжено с непрозрачностью, огромными финансовыми затратами и риском потери года.</a:t>
             </a:r>
           </a:p>
         </p:txBody>
@@ -3591,8 +3990,8 @@
         </p:nvSpPr>
         <p:spPr>
           <a:xfrm>
-            <a:off x="731520" y="1920240"/>
-            <a:ext cx="3383280" cy="4297680"/>
+            <a:off x="731520" y="1783080"/>
+            <a:ext cx="3383280" cy="4572000"/>
           </a:xfrm>
           <a:prstGeom prst="roundRect">
             <a:avLst/>
@@ -3625,7 +4024,7 @@
           <a:lstStyle/>
           <a:p>
             <a:pPr algn="ctr">
-              <a:defRPr sz="2800" b="1">
+              <a:defRPr sz="2600" b="1">
                 <a:solidFill>
                   <a:srgbClr val="E11D48"/>
                 </a:solidFill>
@@ -3639,9 +4038,41 @@
           <a:p>
             <a:pPr>
               <a:spcBef>
+                <a:spcPts val="600"/>
+              </a:spcBef>
+              <a:defRPr sz="1600" b="1">
+                <a:solidFill>
+                  <a:srgbClr val="0F172A"/>
+                </a:solidFill>
+                <a:latin typeface="Arial"/>
+              </a:defRPr>
+            </a:pPr>
+            <a:r>
+              <a:t>Информационный хаос</a:t>
+            </a:r>
+          </a:p>
+          <a:p>
+            <a:pPr>
+              <a:spcBef>
                 <a:spcPts val="800"/>
               </a:spcBef>
-              <a:defRPr sz="1700" b="1">
+              <a:defRPr sz="1100">
+                <a:solidFill>
+                  <a:srgbClr val="64748B"/>
+                </a:solidFill>
+                <a:latin typeface="Arial"/>
+              </a:defRPr>
+            </a:pPr>
+            <a:r>
+              <a:t>Сотни сайтов вузов на разных языках, скрытые требования, разрозненные даты ранней и поздней волн подачи. Поиск отнимает до 120 часов рутинного времени.</a:t>
+            </a:r>
+          </a:p>
+          <a:p>
+            <a:pPr>
+              <a:spcBef>
+                <a:spcPts val="2400"/>
+              </a:spcBef>
+              <a:defRPr sz="1800" b="1">
                 <a:solidFill>
                   <a:srgbClr val="0F172A"/>
                 </a:solidFill>
@@ -3649,15 +4080,12 @@
               </a:defRPr>
             </a:pPr>
             <a:r>
-              <a:t>Информационный хаос</a:t>
-            </a:r>
-          </a:p>
-          <a:p>
-            <a:pPr>
-              <a:spcBef>
-                <a:spcPts val="800"/>
-              </a:spcBef>
-              <a:defRPr sz="1100">
+              <a:t>120+ часов</a:t>
+            </a:r>
+          </a:p>
+          <a:p>
+            <a:pPr>
+              <a:defRPr sz="1000">
                 <a:solidFill>
                   <a:srgbClr val="64748B"/>
                 </a:solidFill>
@@ -3665,36 +4093,7 @@
               </a:defRPr>
             </a:pPr>
             <a:r>
-              <a:t>Сотни разрозненных сайтов университетов на разных языках, скрытые или противоречивые требования, запутанные дедлайны разных волн поступления.</a:t>
-            </a:r>
-          </a:p>
-          <a:p>
-            <a:pPr>
-              <a:spcBef>
-                <a:spcPts val="2400"/>
-              </a:spcBef>
-              <a:defRPr sz="1800" b="1">
-                <a:solidFill>
-                  <a:srgbClr val="0F172A"/>
-                </a:solidFill>
-                <a:latin typeface="Arial"/>
-              </a:defRPr>
-            </a:pPr>
-            <a:r>
-              <a:t>82% абитуриентов</a:t>
-            </a:r>
-          </a:p>
-          <a:p>
-            <a:pPr>
-              <a:defRPr sz="1000">
-                <a:solidFill>
-                  <a:srgbClr val="64748B"/>
-                </a:solidFill>
-                <a:latin typeface="Arial"/>
-              </a:defRPr>
-            </a:pPr>
-            <a:r>
-              <a:t>тратят более 100 часов на ручной поиск данных</a:t>
+              <a:t>тратит семья на ручной сбор информации</a:t>
             </a:r>
           </a:p>
         </p:txBody>
@@ -3707,8 +4106,8 @@
         </p:nvSpPr>
         <p:spPr>
           <a:xfrm>
-            <a:off x="4389120" y="1920240"/>
-            <a:ext cx="3383280" cy="4297680"/>
+            <a:off x="4389120" y="1783080"/>
+            <a:ext cx="3383280" cy="4572000"/>
           </a:xfrm>
           <a:prstGeom prst="roundRect">
             <a:avLst/>
@@ -3741,7 +4140,7 @@
           <a:lstStyle/>
           <a:p>
             <a:pPr algn="ctr">
-              <a:defRPr sz="2800" b="1">
+              <a:defRPr sz="2600" b="1">
                 <a:solidFill>
                   <a:srgbClr val="E11D48"/>
                 </a:solidFill>
@@ -3755,9 +4154,41 @@
           <a:p>
             <a:pPr>
               <a:spcBef>
+                <a:spcPts val="600"/>
+              </a:spcBef>
+              <a:defRPr sz="1600" b="1">
+                <a:solidFill>
+                  <a:srgbClr val="0F172A"/>
+                </a:solidFill>
+                <a:latin typeface="Arial"/>
+              </a:defRPr>
+            </a:pPr>
+            <a:r>
+              <a:t>Дорогие агентства</a:t>
+            </a:r>
+          </a:p>
+          <a:p>
+            <a:pPr>
+              <a:spcBef>
                 <a:spcPts val="800"/>
               </a:spcBef>
-              <a:defRPr sz="1700" b="1">
+              <a:defRPr sz="1100">
+                <a:solidFill>
+                  <a:srgbClr val="64748B"/>
+                </a:solidFill>
+                <a:latin typeface="Arial"/>
+              </a:defRPr>
+            </a:pPr>
+            <a:r>
+              <a:t>Консалтинговые компании берут от $1,500 до $4,000 за подачу документов, часто продвигая коммерческие платные вузы-партнеры без гарантий гранта.</a:t>
+            </a:r>
+          </a:p>
+          <a:p>
+            <a:pPr>
+              <a:spcBef>
+                <a:spcPts val="2400"/>
+              </a:spcBef>
+              <a:defRPr sz="1800" b="1">
                 <a:solidFill>
                   <a:srgbClr val="0F172A"/>
                 </a:solidFill>
@@ -3765,15 +4196,12 @@
               </a:defRPr>
             </a:pPr>
             <a:r>
-              <a:t>Дорогие агентства</a:t>
-            </a:r>
-          </a:p>
-          <a:p>
-            <a:pPr>
-              <a:spcBef>
-                <a:spcPts val="800"/>
-              </a:spcBef>
-              <a:defRPr sz="1100">
+              <a:t>$1,500 – $4,000</a:t>
+            </a:r>
+          </a:p>
+          <a:p>
+            <a:pPr>
+              <a:defRPr sz="1000">
                 <a:solidFill>
                   <a:srgbClr val="64748B"/>
                 </a:solidFill>
@@ -3781,36 +4209,7 @@
               </a:defRPr>
             </a:pPr>
             <a:r>
-              <a:t>Консалтинговые агентства берут от $1,000 до $5,000 за подачу документов, при этом часто продвигают партнерские платные вузы без гарантий гранта.</a:t>
-            </a:r>
-          </a:p>
-          <a:p>
-            <a:pPr>
-              <a:spcBef>
-                <a:spcPts val="2400"/>
-              </a:spcBef>
-              <a:defRPr sz="1800" b="1">
-                <a:solidFill>
-                  <a:srgbClr val="0F172A"/>
-                </a:solidFill>
-                <a:latin typeface="Arial"/>
-              </a:defRPr>
-            </a:pPr>
-            <a:r>
-              <a:t>$1,500 – $4,000</a:t>
-            </a:r>
-          </a:p>
-          <a:p>
-            <a:pPr>
-              <a:defRPr sz="1000">
-                <a:solidFill>
-                  <a:srgbClr val="64748B"/>
-                </a:solidFill>
-                <a:latin typeface="Arial"/>
-              </a:defRPr>
-            </a:pPr>
-            <a:r>
-              <a:t>средняя стоимость услуг агентств в Казахстане</a:t>
+              <a:t>средний чек консалтинга в Казахстане</a:t>
             </a:r>
           </a:p>
         </p:txBody>
@@ -3823,8 +4222,8 @@
         </p:nvSpPr>
         <p:spPr>
           <a:xfrm>
-            <a:off x="8046720" y="1920240"/>
-            <a:ext cx="3383280" cy="4297680"/>
+            <a:off x="8046720" y="1783080"/>
+            <a:ext cx="3383280" cy="4572000"/>
           </a:xfrm>
           <a:prstGeom prst="roundRect">
             <a:avLst/>
@@ -3857,7 +4256,7 @@
           <a:lstStyle/>
           <a:p>
             <a:pPr algn="ctr">
-              <a:defRPr sz="2800" b="1">
+              <a:defRPr sz="2600" b="1">
                 <a:solidFill>
                   <a:srgbClr val="E11D48"/>
                 </a:solidFill>
@@ -3871,9 +4270,41 @@
           <a:p>
             <a:pPr>
               <a:spcBef>
+                <a:spcPts val="600"/>
+              </a:spcBef>
+              <a:defRPr sz="1600" b="1">
+                <a:solidFill>
+                  <a:srgbClr val="0F172A"/>
+                </a:solidFill>
+                <a:latin typeface="Arial"/>
+              </a:defRPr>
+            </a:pPr>
+            <a:r>
+              <a:t>Ложные надежды и отказ</a:t>
+            </a:r>
+          </a:p>
+          <a:p>
+            <a:pPr>
+              <a:spcBef>
                 <a:spcPts val="800"/>
               </a:spcBef>
-              <a:defRPr sz="1700" b="1">
+              <a:defRPr sz="1100">
+                <a:solidFill>
+                  <a:srgbClr val="64748B"/>
+                </a:solidFill>
+                <a:latin typeface="Arial"/>
+              </a:defRPr>
+            </a:pPr>
+            <a:r>
+              <a:t>Без объективной аналитики абитуриенты подают только в недосягаемые Reach-вузы и при отказе теряют целый учебный год, оставаясь без альтернатив.</a:t>
+            </a:r>
+          </a:p>
+          <a:p>
+            <a:pPr>
+              <a:spcBef>
+                <a:spcPts val="2400"/>
+              </a:spcBef>
+              <a:defRPr sz="1800" b="1">
                 <a:solidFill>
                   <a:srgbClr val="0F172A"/>
                 </a:solidFill>
@@ -3881,15 +4312,12 @@
               </a:defRPr>
             </a:pPr>
             <a:r>
-              <a:t>Ложные надежды и риск отказа</a:t>
-            </a:r>
-          </a:p>
-          <a:p>
-            <a:pPr>
-              <a:spcBef>
-                <a:spcPts val="800"/>
-              </a:spcBef>
-              <a:defRPr sz="1100">
+              <a:t>до 45% отказов</a:t>
+            </a:r>
+          </a:p>
+          <a:p>
+            <a:pPr>
+              <a:defRPr sz="1000">
                 <a:solidFill>
                   <a:srgbClr val="64748B"/>
                 </a:solidFill>
@@ -3897,36 +4325,7 @@
               </a:defRPr>
             </a:pPr>
             <a:r>
-              <a:t>Абитуриенты без объективной аналитики подают только в недосягаемые топовые вузы (Harvard, Oxford, NU) и при отказе теряют целый учебный год.</a:t>
-            </a:r>
-          </a:p>
-          <a:p>
-            <a:pPr>
-              <a:spcBef>
-                <a:spcPts val="2400"/>
-              </a:spcBef>
-              <a:defRPr sz="1800" b="1">
-                <a:solidFill>
-                  <a:srgbClr val="0F172A"/>
-                </a:solidFill>
-                <a:latin typeface="Arial"/>
-              </a:defRPr>
-            </a:pPr>
-            <a:r>
-              <a:t>до 45% отказов</a:t>
-            </a:r>
-          </a:p>
-          <a:p>
-            <a:pPr>
-              <a:defRPr sz="1000">
-                <a:solidFill>
-                  <a:srgbClr val="64748B"/>
-                </a:solidFill>
-                <a:latin typeface="Arial"/>
-              </a:defRPr>
-            </a:pPr>
-            <a:r>
-              <a:t>из-за несбалансированного списка программ</a:t>
+              <a:t>из-за несбалансированного списка вузов</a:t>
             </a:r>
           </a:p>
         </p:txBody>
@@ -4000,8 +4399,8 @@
         </p:nvSpPr>
         <p:spPr>
           <a:xfrm>
-            <a:off x="731520" y="457200"/>
-            <a:ext cx="10515600" cy="320040"/>
+            <a:off x="731520" y="411480"/>
+            <a:ext cx="10698480" cy="292608"/>
           </a:xfrm>
           <a:prstGeom prst="rect">
             <a:avLst/>
@@ -4023,7 +4422,7 @@
               </a:defRPr>
             </a:pPr>
             <a:r>
-              <a:t>НАШЕ РЕШЕНИЕ</a:t>
+              <a:t>2. НАШЕ РЕШЕНИЕ</a:t>
             </a:r>
           </a:p>
         </p:txBody>
@@ -4036,8 +4435,8 @@
         </p:nvSpPr>
         <p:spPr>
           <a:xfrm>
-            <a:off x="731520" y="777240"/>
-            <a:ext cx="10515600" cy="548640"/>
+            <a:off x="731520" y="731520"/>
+            <a:ext cx="10698480" cy="502920"/>
           </a:xfrm>
           <a:prstGeom prst="rect">
             <a:avLst/>
@@ -4051,7 +4450,7 @@
           <a:lstStyle/>
           <a:p>
             <a:pPr>
-              <a:defRPr sz="2400" b="1">
+              <a:defRPr sz="2200" b="1">
                 <a:solidFill>
                   <a:srgbClr val="0F172A"/>
                 </a:solidFill>
@@ -4059,7 +4458,7 @@
               </a:defRPr>
             </a:pPr>
             <a:r>
-              <a:t>AdmitRoute: Ваш персональный AI-навигатор поступления</a:t>
+              <a:t>AdmitRoute: Персональный AI-навигатор поступления</a:t>
             </a:r>
           </a:p>
         </p:txBody>
@@ -4072,8 +4471,8 @@
         </p:nvSpPr>
         <p:spPr>
           <a:xfrm>
-            <a:off x="731520" y="1325880"/>
-            <a:ext cx="10515600" cy="365760"/>
+            <a:off x="731520" y="1261872"/>
+            <a:ext cx="10698480" cy="365760"/>
           </a:xfrm>
           <a:prstGeom prst="rect">
             <a:avLst/>
@@ -4087,7 +4486,7 @@
           <a:lstStyle/>
           <a:p>
             <a:pPr>
-              <a:defRPr sz="1300">
+              <a:defRPr sz="1200">
                 <a:solidFill>
                   <a:srgbClr val="64748B"/>
                 </a:solidFill>
@@ -4095,7 +4494,7 @@
               </a:defRPr>
             </a:pPr>
             <a:r>
-              <a:t>Интеллектуальная цифровая платформа, заменяющая дорогое агентство объективной математической аналитикой.</a:t>
+              <a:t>Объективная математическая оценка шансов, строгая защита от иллюзий и персональный пошаговый маршрут.</a:t>
             </a:r>
           </a:p>
         </p:txBody>
@@ -4108,8 +4507,8 @@
         </p:nvSpPr>
         <p:spPr>
           <a:xfrm>
-            <a:off x="731520" y="1920240"/>
-            <a:ext cx="3383280" cy="4297680"/>
+            <a:off x="731520" y="1783080"/>
+            <a:ext cx="3383280" cy="4572000"/>
           </a:xfrm>
           <a:prstGeom prst="roundRect">
             <a:avLst/>
@@ -4158,7 +4557,7 @@
               <a:spcBef>
                 <a:spcPts val="600"/>
               </a:spcBef>
-              <a:defRPr sz="1700" b="1">
+              <a:defRPr sz="1600" b="1">
                 <a:solidFill>
                   <a:srgbClr val="0F172A"/>
                 </a:solidFill>
@@ -4166,7 +4565,7 @@
               </a:defRPr>
             </a:pPr>
             <a:r>
-              <a:t>Объективная оценка шансов</a:t>
+              <a:t>Прозрачный расчет шансов</a:t>
             </a:r>
           </a:p>
           <a:p>
@@ -4182,7 +4581,7 @@
               </a:defRPr>
             </a:pPr>
             <a:r>
-              <a:t>Алгоритм анализирует GPA, языковой сертификат (IELTS/TOEFL), стандартизированные тесты (SAT/ЕНТ) и внеучебные активности, сопоставляя их с реальными проходными порогами.</a:t>
+              <a:t>Алгоритм сопоставляет GPA, IELTS/TOEFL, SAT/ЕНТ и активности с реальными требованиями вузов. Категоризация: Safety (надежные), Target (целевые), Reach (сложные), Unlikely (маловероятные).</a:t>
             </a:r>
           </a:p>
           <a:p>
@@ -4198,7 +4597,7 @@
               </a:defRPr>
             </a:pPr>
             <a:r>
-              <a:t>✓ Категории: Safety, Target, Reach, Unlikely</a:t>
+              <a:t>✓ Точный расчет шансов в %</a:t>
             </a:r>
           </a:p>
           <a:p>
@@ -4214,7 +4613,7 @@
               </a:defRPr>
             </a:pPr>
             <a:r>
-              <a:t>✓ Точный расчет шанса в процентах</a:t>
+              <a:t>✓ Выявление академических пробелов</a:t>
             </a:r>
           </a:p>
           <a:p>
@@ -4230,7 +4629,7 @@
               </a:defRPr>
             </a:pPr>
             <a:r>
-              <a:t>✓ Подробное объяснение слабых мест</a:t>
+              <a:t>✓ Качественное объяснение «Почему подходит»</a:t>
             </a:r>
           </a:p>
         </p:txBody>
@@ -4243,8 +4642,8 @@
         </p:nvSpPr>
         <p:spPr>
           <a:xfrm>
-            <a:off x="4389120" y="1920240"/>
-            <a:ext cx="3383280" cy="4297680"/>
+            <a:off x="4389120" y="1783080"/>
+            <a:ext cx="3383280" cy="4572000"/>
           </a:xfrm>
           <a:prstGeom prst="roundRect">
             <a:avLst/>
@@ -4293,7 +4692,7 @@
               <a:spcBef>
                 <a:spcPts val="600"/>
               </a:spcBef>
-              <a:defRPr sz="1700" b="1">
+              <a:defRPr sz="1600" b="1">
                 <a:solidFill>
                   <a:srgbClr val="0F172A"/>
                 </a:solidFill>
@@ -4301,7 +4700,7 @@
               </a:defRPr>
             </a:pPr>
             <a:r>
-              <a:t>Защита от завышенных ожиданий</a:t>
+              <a:t>Защита от риска отказа</a:t>
             </a:r>
           </a:p>
           <a:p>
@@ -4317,7 +4716,7 @@
               </a:defRPr>
             </a:pPr>
             <a:r>
-              <a:t>Система честно предупреждает о рисках отказа. Если профиль слаб для элитного вуза, AdmitRoute прямо указывает на это и предлагает сильные альтернативы со стипендиями.</a:t>
+              <a:t>Система не дает ложных надежд: если профиль слаб для элитной программы, AdmitRoute прямо указывает на низкую вероятность (&lt;12%) и предлагает гарантированные альтернативы со стипендиями.</a:t>
             </a:r>
           </a:p>
           <a:p>
@@ -4349,7 +4748,7 @@
               </a:defRPr>
             </a:pPr>
             <a:r>
-              <a:t>✓ Балансировка стратегии (не менее 2 Safety)</a:t>
+              <a:t>✓ Обязательная балансировка Safety-вузов</a:t>
             </a:r>
           </a:p>
           <a:p>
@@ -4378,8 +4777,8 @@
         </p:nvSpPr>
         <p:spPr>
           <a:xfrm>
-            <a:off x="8046720" y="1920240"/>
-            <a:ext cx="3383280" cy="4297680"/>
+            <a:off x="8046720" y="1783080"/>
+            <a:ext cx="3383280" cy="4572000"/>
           </a:xfrm>
           <a:prstGeom prst="roundRect">
             <a:avLst/>
@@ -4428,7 +4827,7 @@
               <a:spcBef>
                 <a:spcPts val="600"/>
               </a:spcBef>
-              <a:defRPr sz="1700" b="1">
+              <a:defRPr sz="1600" b="1">
                 <a:solidFill>
                   <a:srgbClr val="0F172A"/>
                 </a:solidFill>
@@ -4436,7 +4835,7 @@
               </a:defRPr>
             </a:pPr>
             <a:r>
-              <a:t>Четкий план до дедлайна</a:t>
+              <a:t>План действий до дедлайна</a:t>
             </a:r>
           </a:p>
           <a:p>
@@ -4452,7 +4851,7 @@
               </a:defRPr>
             </a:pPr>
             <a:r>
-              <a:t>Автоматическое построение графика подготовки: 3 волны подачи заявок (Early, Regular, Late), чек-лист документов, грантовая статистика и генератор каркаса эссе.</a:t>
+              <a:t>Формирование персонального графика с 3 волнами подачи (ранняя, регулярная, поздняя), статистики грантов прошлого года и генератора каркаса мотивационного письма (Personal Statement).</a:t>
             </a:r>
           </a:p>
           <a:p>
@@ -4468,7 +4867,7 @@
               </a:defRPr>
             </a:pPr>
             <a:r>
-              <a:t>✓ Сроки ранней и поздней волн</a:t>
+              <a:t>✓ Сроки Early / Regular / Late</a:t>
             </a:r>
           </a:p>
           <a:p>
@@ -4484,7 +4883,7 @@
               </a:defRPr>
             </a:pPr>
             <a:r>
-              <a:t>✓ Конкурс на 1 грантовое место</a:t>
+              <a:t>✓ Прошлогодний конкурс на место</a:t>
             </a:r>
           </a:p>
           <a:p>
@@ -4500,7 +4899,7 @@
               </a:defRPr>
             </a:pPr>
             <a:r>
-              <a:t>✓ AI-помощник мотивационного письма</a:t>
+              <a:t>✓ Индивидуальный чек-лист документов</a:t>
             </a:r>
           </a:p>
         </p:txBody>
@@ -4574,8 +4973,8 @@
         </p:nvSpPr>
         <p:spPr>
           <a:xfrm>
-            <a:off x="731520" y="457200"/>
-            <a:ext cx="10515600" cy="320040"/>
+            <a:off x="731520" y="411480"/>
+            <a:ext cx="10698480" cy="292608"/>
           </a:xfrm>
           <a:prstGeom prst="rect">
             <a:avLst/>
@@ -4597,7 +4996,7 @@
               </a:defRPr>
             </a:pPr>
             <a:r>
-              <a:t>ВОЗМОЖНОСТИ ПЛАТФОРМЫ</a:t>
+              <a:t>3. ЦЕЛЕВАЯ АУДИТОРИЯ</a:t>
             </a:r>
           </a:p>
         </p:txBody>
@@ -4610,8 +5009,8 @@
         </p:nvSpPr>
         <p:spPr>
           <a:xfrm>
-            <a:off x="731520" y="777240"/>
-            <a:ext cx="10515600" cy="548640"/>
+            <a:off x="731520" y="731520"/>
+            <a:ext cx="10698480" cy="502920"/>
           </a:xfrm>
           <a:prstGeom prst="rect">
             <a:avLst/>
@@ -4625,7 +5024,7 @@
           <a:lstStyle/>
           <a:p>
             <a:pPr>
-              <a:defRPr sz="2400" b="1">
+              <a:defRPr sz="2200" b="1">
                 <a:solidFill>
                   <a:srgbClr val="0F172A"/>
                 </a:solidFill>
@@ -4633,7 +5032,7 @@
               </a:defRPr>
             </a:pPr>
             <a:r>
-              <a:t>Ключевой функционал AdmitRoute</a:t>
+              <a:t>Кто наши пользователи и кто принимает решение?</a:t>
             </a:r>
           </a:p>
         </p:txBody>
@@ -4646,8 +5045,8 @@
         </p:nvSpPr>
         <p:spPr>
           <a:xfrm>
-            <a:off x="731520" y="1325880"/>
-            <a:ext cx="10515600" cy="365760"/>
+            <a:off x="731520" y="1261872"/>
+            <a:ext cx="10698480" cy="365760"/>
           </a:xfrm>
           <a:prstGeom prst="rect">
             <a:avLst/>
@@ -4661,7 +5060,7 @@
           <a:lstStyle/>
           <a:p>
             <a:pPr>
-              <a:defRPr sz="1300">
+              <a:defRPr sz="1200">
                 <a:solidFill>
                   <a:srgbClr val="64748B"/>
                 </a:solidFill>
@@ -4669,7 +5068,7 @@
               </a:defRPr>
             </a:pPr>
             <a:r>
-              <a:t>Комплекс инструментов, покрывающий весь путь абитуриента от выбора специальности до отправки документов.</a:t>
+              <a:t>Четкая сегментация аудитории с глубоким пониманием болей каждого сегмента и ценности AdmitRoute.</a:t>
             </a:r>
           </a:p>
         </p:txBody>
@@ -4682,8 +5081,8 @@
         </p:nvSpPr>
         <p:spPr>
           <a:xfrm>
-            <a:off x="731520" y="1920240"/>
-            <a:ext cx="5120640" cy="1965960"/>
+            <a:off x="731520" y="1783080"/>
+            <a:ext cx="3383280" cy="4572000"/>
           </a:xfrm>
           <a:prstGeom prst="roundRect">
             <a:avLst/>
@@ -4693,7 +5092,7 @@
           </a:solidFill>
           <a:ln>
             <a:solidFill>
-              <a:srgbClr val="E2E8F0"/>
+              <a:srgbClr val="2563EB"/>
             </a:solidFill>
           </a:ln>
         </p:spPr>
@@ -4712,27 +5111,139 @@
           </a:fontRef>
         </p:style>
         <p:txBody>
-          <a:bodyPr rtlCol="0" anchor="ctr" wrap="square" lIns="274320" rIns="274320" tIns="182880"/>
+          <a:bodyPr rtlCol="0" anchor="ctr" wrap="square" lIns="256032" rIns="256032" tIns="228600"/>
           <a:lstStyle/>
           <a:p>
             <a:pPr algn="ctr">
+              <a:defRPr sz="950" b="1">
+                <a:solidFill>
+                  <a:srgbClr val="2563EB"/>
+                </a:solidFill>
+                <a:latin typeface="Arial"/>
+              </a:defRPr>
+            </a:pPr>
+            <a:r>
+              <a:t>B2C • КОНЕЧНЫЙ ПОЛЬЗОВАТЕЛЬ</a:t>
+            </a:r>
+          </a:p>
+          <a:p>
+            <a:pPr>
+              <a:spcBef>
+                <a:spcPts val="400"/>
+              </a:spcBef>
+              <a:defRPr sz="1600" b="1">
+                <a:solidFill>
+                  <a:srgbClr val="0F172A"/>
+                </a:solidFill>
+                <a:latin typeface="Arial"/>
+              </a:defRPr>
+            </a:pPr>
+            <a:r>
+              <a:t>Выпускники 10–11 классов</a:t>
+            </a:r>
+          </a:p>
+          <a:p>
+            <a:pPr>
+              <a:spcBef>
+                <a:spcPts val="400"/>
+              </a:spcBef>
+              <a:defRPr sz="1050">
+                <a:solidFill>
+                  <a:srgbClr val="64748B"/>
+                </a:solidFill>
+                <a:latin typeface="Arial"/>
+              </a:defRPr>
+            </a:pPr>
+            <a:r>
+              <a:t>Учащиеся школ, лицеев, НИШ и БИЛ, нацеленные на поступление на грант в Казахстане, Европе, Азии или США.</a:t>
+            </a:r>
+          </a:p>
+          <a:p>
+            <a:pPr>
+              <a:spcBef>
+                <a:spcPts val="1000"/>
+              </a:spcBef>
               <a:defRPr sz="1000" b="1">
                 <a:solidFill>
-                  <a:srgbClr val="7C3AED"/>
-                </a:solidFill>
-                <a:latin typeface="Arial"/>
-              </a:defRPr>
-            </a:pPr>
-            <a:r>
-              <a:t>GOOGLE GEMINI 3.6 FLASH</a:t>
-            </a:r>
-          </a:p>
-          <a:p>
-            <a:pPr>
-              <a:spcBef>
-                <a:spcPts val="400"/>
-              </a:spcBef>
-              <a:defRPr sz="1500" b="1">
+                  <a:srgbClr val="E11D48"/>
+                </a:solidFill>
+                <a:latin typeface="Arial"/>
+              </a:defRPr>
+            </a:pPr>
+            <a:r>
+              <a:t>КЛЮЧЕВЫЕ БОЛИ:</a:t>
+            </a:r>
+          </a:p>
+          <a:p>
+            <a:pPr>
+              <a:spcBef>
+                <a:spcPts val="200"/>
+              </a:spcBef>
+              <a:defRPr sz="950">
+                <a:solidFill>
+                  <a:srgbClr val="475569"/>
+                </a:solidFill>
+                <a:latin typeface="Arial"/>
+              </a:defRPr>
+            </a:pPr>
+            <a:r>
+              <a:t>✕ Информационный хаос (120+ часов на сайты)</a:t>
+            </a:r>
+          </a:p>
+          <a:p>
+            <a:pPr>
+              <a:spcBef>
+                <a:spcPts val="200"/>
+              </a:spcBef>
+              <a:defRPr sz="950">
+                <a:solidFill>
+                  <a:srgbClr val="475569"/>
+                </a:solidFill>
+                <a:latin typeface="Arial"/>
+              </a:defRPr>
+            </a:pPr>
+            <a:r>
+              <a:t>✕ Непонимание реальных шансов на грант</a:t>
+            </a:r>
+          </a:p>
+          <a:p>
+            <a:pPr>
+              <a:spcBef>
+                <a:spcPts val="200"/>
+              </a:spcBef>
+              <a:defRPr sz="950">
+                <a:solidFill>
+                  <a:srgbClr val="475569"/>
+                </a:solidFill>
+                <a:latin typeface="Arial"/>
+              </a:defRPr>
+            </a:pPr>
+            <a:r>
+              <a:t>✕ Страх провалить дедлайны и потерять год</a:t>
+            </a:r>
+          </a:p>
+          <a:p>
+            <a:pPr>
+              <a:spcBef>
+                <a:spcPts val="1000"/>
+              </a:spcBef>
+              <a:defRPr sz="1000" b="1">
+                <a:solidFill>
+                  <a:srgbClr val="10B981"/>
+                </a:solidFill>
+                <a:latin typeface="Arial"/>
+              </a:defRPr>
+            </a:pPr>
+            <a:r>
+              <a:t>ЦЕННОСТЬ ADMITROUTE:</a:t>
+            </a:r>
+          </a:p>
+          <a:p>
+            <a:pPr>
+              <a:spcBef>
+                <a:spcPts val="200"/>
+              </a:spcBef>
+              <a:defRPr sz="950" b="1">
                 <a:solidFill>
                   <a:srgbClr val="0F172A"/>
                 </a:solidFill>
@@ -4740,23 +5251,39 @@
               </a:defRPr>
             </a:pPr>
             <a:r>
-              <a:t>Живой поиск любого вуза мира</a:t>
-            </a:r>
-          </a:p>
-          <a:p>
-            <a:pPr>
-              <a:spcBef>
-                <a:spcPts val="400"/>
-              </a:spcBef>
-              <a:defRPr sz="1100">
-                <a:solidFill>
-                  <a:srgbClr val="64748B"/>
-                </a:solidFill>
-                <a:latin typeface="Arial"/>
-              </a:defRPr>
-            </a:pPr>
-            <a:r>
-              <a:t>Интеграция с передовым ИИ: пользователь может ввести название любого университета планеты (Тренто, Bocconi, Waterloo, КарГУ) и мгновенно получить карточку с требованиями, дедлайнами и шансами.</a:t>
+              <a:t>✓ Точный расчет шансов в % без иллюзий</a:t>
+            </a:r>
+          </a:p>
+          <a:p>
+            <a:pPr>
+              <a:spcBef>
+                <a:spcPts val="200"/>
+              </a:spcBef>
+              <a:defRPr sz="950" b="1">
+                <a:solidFill>
+                  <a:srgbClr val="0F172A"/>
+                </a:solidFill>
+                <a:latin typeface="Arial"/>
+              </a:defRPr>
+            </a:pPr>
+            <a:r>
+              <a:t>✓ Персональный роадмап и Safety-вузы</a:t>
+            </a:r>
+          </a:p>
+          <a:p>
+            <a:pPr>
+              <a:spcBef>
+                <a:spcPts val="200"/>
+              </a:spcBef>
+              <a:defRPr sz="950" b="1">
+                <a:solidFill>
+                  <a:srgbClr val="0F172A"/>
+                </a:solidFill>
+                <a:latin typeface="Arial"/>
+              </a:defRPr>
+            </a:pPr>
+            <a:r>
+              <a:t>✓ Бот в Telegram с напоминаниями дедлайнов</a:t>
             </a:r>
           </a:p>
         </p:txBody>
@@ -4769,8 +5296,8 @@
         </p:nvSpPr>
         <p:spPr>
           <a:xfrm>
-            <a:off x="6126480" y="1920240"/>
-            <a:ext cx="5120640" cy="1965960"/>
+            <a:off x="4389120" y="1783080"/>
+            <a:ext cx="3383280" cy="4572000"/>
           </a:xfrm>
           <a:prstGeom prst="roundRect">
             <a:avLst/>
@@ -4780,7 +5307,7 @@
           </a:solidFill>
           <a:ln>
             <a:solidFill>
-              <a:srgbClr val="E2E8F0"/>
+              <a:srgbClr val="7C3AED"/>
             </a:solidFill>
           </a:ln>
         </p:spPr>
@@ -4799,27 +5326,139 @@
           </a:fontRef>
         </p:style>
         <p:txBody>
-          <a:bodyPr rtlCol="0" anchor="ctr" wrap="square" lIns="274320" rIns="274320" tIns="182880"/>
+          <a:bodyPr rtlCol="0" anchor="ctr" wrap="square" lIns="256032" rIns="256032" tIns="228600"/>
           <a:lstStyle/>
           <a:p>
             <a:pPr algn="ctr">
+              <a:defRPr sz="950" b="1">
+                <a:solidFill>
+                  <a:srgbClr val="7C3AED"/>
+                </a:solidFill>
+                <a:latin typeface="Arial"/>
+              </a:defRPr>
+            </a:pPr>
+            <a:r>
+              <a:t>B2C • ПЛАТЕЛЬЩИК И СЕМЬЯ</a:t>
+            </a:r>
+          </a:p>
+          <a:p>
+            <a:pPr>
+              <a:spcBef>
+                <a:spcPts val="400"/>
+              </a:spcBef>
+              <a:defRPr sz="1600" b="1">
+                <a:solidFill>
+                  <a:srgbClr val="0F172A"/>
+                </a:solidFill>
+                <a:latin typeface="Arial"/>
+              </a:defRPr>
+            </a:pPr>
+            <a:r>
+              <a:t>Родители абитуриентов</a:t>
+            </a:r>
+          </a:p>
+          <a:p>
+            <a:pPr>
+              <a:spcBef>
+                <a:spcPts val="400"/>
+              </a:spcBef>
+              <a:defRPr sz="1050">
+                <a:solidFill>
+                  <a:srgbClr val="64748B"/>
+                </a:solidFill>
+                <a:latin typeface="Arial"/>
+              </a:defRPr>
+            </a:pPr>
+            <a:r>
+              <a:t>Принимают финансовые решения в семье, несут колоссальную эмоциональную нагрузку и оплачивают подготовку.</a:t>
+            </a:r>
+          </a:p>
+          <a:p>
+            <a:pPr>
+              <a:spcBef>
+                <a:spcPts val="1000"/>
+              </a:spcBef>
               <a:defRPr sz="1000" b="1">
                 <a:solidFill>
-                  <a:srgbClr val="2563EB"/>
-                </a:solidFill>
-                <a:latin typeface="Arial"/>
-              </a:defRPr>
-            </a:pPr>
-            <a:r>
-              <a:t>ВЕРИФИЦИРОВАННАЯ БАЗА</a:t>
-            </a:r>
-          </a:p>
-          <a:p>
-            <a:pPr>
-              <a:spcBef>
-                <a:spcPts val="400"/>
-              </a:spcBef>
-              <a:defRPr sz="1500" b="1">
+                  <a:srgbClr val="E11D48"/>
+                </a:solidFill>
+                <a:latin typeface="Arial"/>
+              </a:defRPr>
+            </a:pPr>
+            <a:r>
+              <a:t>КЛЮЧЕВЫЕ БОЛИ:</a:t>
+            </a:r>
+          </a:p>
+          <a:p>
+            <a:pPr>
+              <a:spcBef>
+                <a:spcPts val="200"/>
+              </a:spcBef>
+              <a:defRPr sz="950">
+                <a:solidFill>
+                  <a:srgbClr val="475569"/>
+                </a:solidFill>
+                <a:latin typeface="Arial"/>
+              </a:defRPr>
+            </a:pPr>
+            <a:r>
+              <a:t>✕ Огромные чеки агентств ($1,500 – $4,000)</a:t>
+            </a:r>
+          </a:p>
+          <a:p>
+            <a:pPr>
+              <a:spcBef>
+                <a:spcPts val="200"/>
+              </a:spcBef>
+              <a:defRPr sz="950">
+                <a:solidFill>
+                  <a:srgbClr val="475569"/>
+                </a:solidFill>
+                <a:latin typeface="Arial"/>
+              </a:defRPr>
+            </a:pPr>
+            <a:r>
+              <a:t>✕ Риск потери бюджета и навязывание платных вузов</a:t>
+            </a:r>
+          </a:p>
+          <a:p>
+            <a:pPr>
+              <a:spcBef>
+                <a:spcPts val="200"/>
+              </a:spcBef>
+              <a:defRPr sz="950">
+                <a:solidFill>
+                  <a:srgbClr val="475569"/>
+                </a:solidFill>
+                <a:latin typeface="Arial"/>
+              </a:defRPr>
+            </a:pPr>
+            <a:r>
+              <a:t>✕ Неведение: на каком этапе подготовка ребенка</a:t>
+            </a:r>
+          </a:p>
+          <a:p>
+            <a:pPr>
+              <a:spcBef>
+                <a:spcPts val="1000"/>
+              </a:spcBef>
+              <a:defRPr sz="1000" b="1">
+                <a:solidFill>
+                  <a:srgbClr val="10B981"/>
+                </a:solidFill>
+                <a:latin typeface="Arial"/>
+              </a:defRPr>
+            </a:pPr>
+            <a:r>
+              <a:t>ЦЕННОСТЬ ADMITROUTE:</a:t>
+            </a:r>
+          </a:p>
+          <a:p>
+            <a:pPr>
+              <a:spcBef>
+                <a:spcPts val="200"/>
+              </a:spcBef>
+              <a:defRPr sz="950" b="1">
                 <a:solidFill>
                   <a:srgbClr val="0F172A"/>
                 </a:solidFill>
@@ -4827,23 +5466,39 @@
               </a:defRPr>
             </a:pPr>
             <a:r>
-              <a:t>36+ детальных программ</a:t>
-            </a:r>
-          </a:p>
-          <a:p>
-            <a:pPr>
-              <a:spcBef>
-                <a:spcPts val="400"/>
-              </a:spcBef>
-              <a:defRPr sz="1100">
-                <a:solidFill>
-                  <a:srgbClr val="64748B"/>
-                </a:solidFill>
-                <a:latin typeface="Arial"/>
-              </a:defRPr>
-            </a:pPr>
-            <a:r>
-              <a:t>Тщательно проработанная база: ведущие вузы Казахстана (NU, КБТУ, AITU, SDU), Европы (Италия DSU, Германия TUM, Венгрия Stipendium), Азии (KAIST, NUS) и США.</a:t>
+              <a:t>✓ Экономия семейного бюджета (подписка 4 990 ₸)</a:t>
+            </a:r>
+          </a:p>
+          <a:p>
+            <a:pPr>
+              <a:spcBef>
+                <a:spcPts val="200"/>
+              </a:spcBef>
+              <a:defRPr sz="950" b="1">
+                <a:solidFill>
+                  <a:srgbClr val="0F172A"/>
+                </a:solidFill>
+                <a:latin typeface="Arial"/>
+              </a:defRPr>
+            </a:pPr>
+            <a:r>
+              <a:t>✓ Шеринг-ссылка для родительского контроля</a:t>
+            </a:r>
+          </a:p>
+          <a:p>
+            <a:pPr>
+              <a:spcBef>
+                <a:spcPts val="200"/>
+              </a:spcBef>
+              <a:defRPr sz="950" b="1">
+                <a:solidFill>
+                  <a:srgbClr val="0F172A"/>
+                </a:solidFill>
+                <a:latin typeface="Arial"/>
+              </a:defRPr>
+            </a:pPr>
+            <a:r>
+              <a:t>✓ Уверенность и спокойствие за будущее ребенка</a:t>
             </a:r>
           </a:p>
         </p:txBody>
@@ -4856,8 +5511,8 @@
         </p:nvSpPr>
         <p:spPr>
           <a:xfrm>
-            <a:off x="731520" y="4114800"/>
-            <a:ext cx="5120640" cy="1965960"/>
+            <a:off x="8046720" y="1783080"/>
+            <a:ext cx="3383280" cy="4572000"/>
           </a:xfrm>
           <a:prstGeom prst="roundRect">
             <a:avLst/>
@@ -4867,7 +5522,7 @@
           </a:solidFill>
           <a:ln>
             <a:solidFill>
-              <a:srgbClr val="E2E8F0"/>
+              <a:srgbClr val="10B981"/>
             </a:solidFill>
           </a:ln>
         </p:spPr>
@@ -4886,27 +5541,139 @@
           </a:fontRef>
         </p:style>
         <p:txBody>
-          <a:bodyPr rtlCol="0" anchor="ctr" wrap="square" lIns="274320" rIns="274320" tIns="182880"/>
+          <a:bodyPr rtlCol="0" anchor="ctr" wrap="square" lIns="256032" rIns="256032" tIns="228600"/>
           <a:lstStyle/>
           <a:p>
             <a:pPr algn="ctr">
+              <a:defRPr sz="950" b="1">
+                <a:solidFill>
+                  <a:srgbClr val="10B981"/>
+                </a:solidFill>
+                <a:latin typeface="Arial"/>
+              </a:defRPr>
+            </a:pPr>
+            <a:r>
+              <a:t>B2B • ПАРТНЕРСТВО И МАСШТАБ</a:t>
+            </a:r>
+          </a:p>
+          <a:p>
+            <a:pPr>
+              <a:spcBef>
+                <a:spcPts val="400"/>
+              </a:spcBef>
+              <a:defRPr sz="1600" b="1">
+                <a:solidFill>
+                  <a:srgbClr val="0F172A"/>
+                </a:solidFill>
+                <a:latin typeface="Arial"/>
+              </a:defRPr>
+            </a:pPr>
+            <a:r>
+              <a:t>Школы и EdTech-центры</a:t>
+            </a:r>
+          </a:p>
+          <a:p>
+            <a:pPr>
+              <a:spcBef>
+                <a:spcPts val="400"/>
+              </a:spcBef>
+              <a:defRPr sz="1050">
+                <a:solidFill>
+                  <a:srgbClr val="64748B"/>
+                </a:solidFill>
+                <a:latin typeface="Arial"/>
+              </a:defRPr>
+            </a:pPr>
+            <a:r>
+              <a:t>Школьные профориентаторы, образовательные центры подготовки к ЕНТ/IELTS и частные консультанты.</a:t>
+            </a:r>
+          </a:p>
+          <a:p>
+            <a:pPr>
+              <a:spcBef>
+                <a:spcPts val="1000"/>
+              </a:spcBef>
               <a:defRPr sz="1000" b="1">
                 <a:solidFill>
-                  <a:srgbClr val="2563EB"/>
-                </a:solidFill>
-                <a:latin typeface="Arial"/>
-              </a:defRPr>
-            </a:pPr>
-            <a:r>
-              <a:t>ГРАНТОВАЯ АНАЛИТИКА</a:t>
-            </a:r>
-          </a:p>
-          <a:p>
-            <a:pPr>
-              <a:spcBef>
-                <a:spcPts val="400"/>
-              </a:spcBef>
-              <a:defRPr sz="1500" b="1">
+                  <a:srgbClr val="E11D48"/>
+                </a:solidFill>
+                <a:latin typeface="Arial"/>
+              </a:defRPr>
+            </a:pPr>
+            <a:r>
+              <a:t>КЛЮЧЕВЫЕ БОЛИ:</a:t>
+            </a:r>
+          </a:p>
+          <a:p>
+            <a:pPr>
+              <a:spcBef>
+                <a:spcPts val="200"/>
+              </a:spcBef>
+              <a:defRPr sz="950">
+                <a:solidFill>
+                  <a:srgbClr val="475569"/>
+                </a:solidFill>
+                <a:latin typeface="Arial"/>
+              </a:defRPr>
+            </a:pPr>
+            <a:r>
+              <a:t>✕ 1 профориентатор на 200+ учеников школы</a:t>
+            </a:r>
+          </a:p>
+          <a:p>
+            <a:pPr>
+              <a:spcBef>
+                <a:spcPts val="200"/>
+              </a:spcBef>
+              <a:defRPr sz="950">
+                <a:solidFill>
+                  <a:srgbClr val="475569"/>
+                </a:solidFill>
+                <a:latin typeface="Arial"/>
+              </a:defRPr>
+            </a:pPr>
+            <a:r>
+              <a:t>✕ Ручной сбор дедлайнов в Excel-таблицах</a:t>
+            </a:r>
+          </a:p>
+          <a:p>
+            <a:pPr>
+              <a:spcBef>
+                <a:spcPts val="200"/>
+              </a:spcBef>
+              <a:defRPr sz="950">
+                <a:solidFill>
+                  <a:srgbClr val="475569"/>
+                </a:solidFill>
+                <a:latin typeface="Arial"/>
+              </a:defRPr>
+            </a:pPr>
+            <a:r>
+              <a:t>✕ Сложность составления отчетов родителям</a:t>
+            </a:r>
+          </a:p>
+          <a:p>
+            <a:pPr>
+              <a:spcBef>
+                <a:spcPts val="1000"/>
+              </a:spcBef>
+              <a:defRPr sz="1000" b="1">
+                <a:solidFill>
+                  <a:srgbClr val="10B981"/>
+                </a:solidFill>
+                <a:latin typeface="Arial"/>
+              </a:defRPr>
+            </a:pPr>
+            <a:r>
+              <a:t>ЦЕННОСТЬ ADMITROUTE:</a:t>
+            </a:r>
+          </a:p>
+          <a:p>
+            <a:pPr>
+              <a:spcBef>
+                <a:spcPts val="200"/>
+              </a:spcBef>
+              <a:defRPr sz="950" b="1">
                 <a:solidFill>
                   <a:srgbClr val="0F172A"/>
                 </a:solidFill>
@@ -4914,86 +5681,15 @@
               </a:defRPr>
             </a:pPr>
             <a:r>
-              <a:t>3 волны дедлайнов и статистика грантов</a:t>
-            </a:r>
-          </a:p>
-          <a:p>
-            <a:pPr>
-              <a:spcBef>
-                <a:spcPts val="400"/>
-              </a:spcBef>
-              <a:defRPr sz="1100">
-                <a:solidFill>
-                  <a:srgbClr val="64748B"/>
-                </a:solidFill>
-                <a:latin typeface="Arial"/>
-              </a:defRPr>
-            </a:pPr>
-            <a:r>
-              <a:t>Каждая программа разбита на Early, Regular и Late волны с указанием прошлогоднего конкурса, проходного балла и вероятности получить полное финансирование (стипендию).</a:t>
-            </a:r>
-          </a:p>
-        </p:txBody>
-      </p:sp>
-      <p:sp>
-        <p:nvSpPr>
-          <p:cNvPr id="9" name="Rounded Rectangle 8"/>
-          <p:cNvSpPr/>
-          <p:nvPr/>
-        </p:nvSpPr>
-        <p:spPr>
-          <a:xfrm>
-            <a:off x="6126480" y="4114800"/>
-            <a:ext cx="5120640" cy="1965960"/>
-          </a:xfrm>
-          <a:prstGeom prst="roundRect">
-            <a:avLst/>
-          </a:prstGeom>
-          <a:solidFill>
-            <a:srgbClr val="FFFFFF"/>
-          </a:solidFill>
-          <a:ln>
-            <a:solidFill>
-              <a:srgbClr val="E2E8F0"/>
-            </a:solidFill>
-          </a:ln>
-        </p:spPr>
-        <p:style>
-          <a:lnRef idx="1">
-            <a:schemeClr val="accent1"/>
-          </a:lnRef>
-          <a:fillRef idx="3">
-            <a:schemeClr val="accent1"/>
-          </a:fillRef>
-          <a:effectRef idx="2">
-            <a:schemeClr val="accent1"/>
-          </a:effectRef>
-          <a:fontRef idx="minor">
-            <a:schemeClr val="lt1"/>
-          </a:fontRef>
-        </p:style>
-        <p:txBody>
-          <a:bodyPr rtlCol="0" anchor="ctr" wrap="square" lIns="274320" rIns="274320" tIns="182880"/>
-          <a:lstStyle/>
-          <a:p>
-            <a:pPr algn="ctr">
-              <a:defRPr sz="1000" b="1">
-                <a:solidFill>
-                  <a:srgbClr val="2563EB"/>
-                </a:solidFill>
-                <a:latin typeface="Arial"/>
-              </a:defRPr>
-            </a:pPr>
-            <a:r>
-              <a:t>ПОРТФОЛИО И ЭССЕ</a:t>
-            </a:r>
-          </a:p>
-          <a:p>
-            <a:pPr>
-              <a:spcBef>
-                <a:spcPts val="400"/>
-              </a:spcBef>
-              <a:defRPr sz="1500" b="1">
+              <a:t>✓ Единая панель мониторинга всех учеников</a:t>
+            </a:r>
+          </a:p>
+          <a:p>
+            <a:pPr>
+              <a:spcBef>
+                <a:spcPts val="200"/>
+              </a:spcBef>
+              <a:defRPr sz="950" b="1">
                 <a:solidFill>
                   <a:srgbClr val="0F172A"/>
                 </a:solidFill>
@@ -5001,23 +5697,23 @@
               </a:defRPr>
             </a:pPr>
             <a:r>
-              <a:t>AI-анализ активностей и каркас эссе</a:t>
-            </a:r>
-          </a:p>
-          <a:p>
-            <a:pPr>
-              <a:spcBef>
-                <a:spcPts val="400"/>
-              </a:spcBef>
-              <a:defRPr sz="1100">
-                <a:solidFill>
-                  <a:srgbClr val="64748B"/>
-                </a:solidFill>
-                <a:latin typeface="Arial"/>
-              </a:defRPr>
-            </a:pPr>
-            <a:r>
-              <a:t>Анализ внешкольных проектов, олимпиад и волонтерства на реалистичность, а также генерация персонализированного каркаса Personal Statement без шаблонных клише.</a:t>
+              <a:t>✓ Экспорт красивых отчетов для родителей</a:t>
+            </a:r>
+          </a:p>
+          <a:p>
+            <a:pPr>
+              <a:spcBef>
+                <a:spcPts val="200"/>
+              </a:spcBef>
+              <a:defRPr sz="950" b="1">
+                <a:solidFill>
+                  <a:srgbClr val="0F172A"/>
+                </a:solidFill>
+                <a:latin typeface="Arial"/>
+              </a:defRPr>
+            </a:pPr>
+            <a:r>
+              <a:t>✓ Повышение % поступления учеников на гранты</a:t>
             </a:r>
           </a:p>
         </p:txBody>
@@ -5091,8 +5787,8 @@
         </p:nvSpPr>
         <p:spPr>
           <a:xfrm>
-            <a:off x="731520" y="457200"/>
-            <a:ext cx="10515600" cy="320040"/>
+            <a:off x="731520" y="411480"/>
+            <a:ext cx="10698480" cy="292608"/>
           </a:xfrm>
           <a:prstGeom prst="rect">
             <a:avLst/>
@@ -5114,7 +5810,7 @@
               </a:defRPr>
             </a:pPr>
             <a:r>
-              <a:t>ПОЛЬЗОВАТЕЛЬСКИЙ ПУТЬ</a:t>
+              <a:t>4. ДЕМОНСТРАЦИЯ</a:t>
             </a:r>
           </a:p>
         </p:txBody>
@@ -5127,8 +5823,8 @@
         </p:nvSpPr>
         <p:spPr>
           <a:xfrm>
-            <a:off x="731520" y="777240"/>
-            <a:ext cx="10515600" cy="548640"/>
+            <a:off x="731520" y="731520"/>
+            <a:ext cx="10698480" cy="502920"/>
           </a:xfrm>
           <a:prstGeom prst="rect">
             <a:avLst/>
@@ -5142,7 +5838,7 @@
           <a:lstStyle/>
           <a:p>
             <a:pPr>
-              <a:defRPr sz="2400" b="1">
+              <a:defRPr sz="2200" b="1">
                 <a:solidFill>
                   <a:srgbClr val="0F172A"/>
                 </a:solidFill>
@@ -5150,7 +5846,7 @@
               </a:defRPr>
             </a:pPr>
             <a:r>
-              <a:t>3 простых шага к осознанному поступлению</a:t>
+              <a:t>Пользовательский путь: от анкеты до гранта за 3 минуты</a:t>
             </a:r>
           </a:p>
         </p:txBody>
@@ -5163,8 +5859,8 @@
         </p:nvSpPr>
         <p:spPr>
           <a:xfrm>
-            <a:off x="731520" y="1325880"/>
-            <a:ext cx="10515600" cy="365760"/>
+            <a:off x="731520" y="1261872"/>
+            <a:ext cx="10698480" cy="365760"/>
           </a:xfrm>
           <a:prstGeom prst="rect">
             <a:avLst/>
@@ -5178,7 +5874,7 @@
           <a:lstStyle/>
           <a:p>
             <a:pPr>
-              <a:defRPr sz="1300">
+              <a:defRPr sz="1200">
                 <a:solidFill>
                   <a:srgbClr val="64748B"/>
                 </a:solidFill>
@@ -5186,7 +5882,7 @@
               </a:defRPr>
             </a:pPr>
             <a:r>
-              <a:t>От первого заполнения профиля до готового пакета документов за 5 минут.</a:t>
+              <a:t>Бесшовный интерактивный сценарий, полностью закрывающий требования Кейса 02 LOCUS Hackathon.</a:t>
             </a:r>
           </a:p>
         </p:txBody>
@@ -5199,8 +5895,8 @@
         </p:nvSpPr>
         <p:spPr>
           <a:xfrm>
-            <a:off x="731520" y="2011680"/>
-            <a:ext cx="3383280" cy="4114800"/>
+            <a:off x="731520" y="1783080"/>
+            <a:ext cx="5120640" cy="2057400"/>
           </a:xfrm>
           <a:prstGeom prst="roundRect">
             <a:avLst/>
@@ -5229,11 +5925,11 @@
           </a:fontRef>
         </p:style>
         <p:txBody>
-          <a:bodyPr rtlCol="0" anchor="ctr" wrap="square" lIns="274320" rIns="274320" tIns="274320"/>
+          <a:bodyPr rtlCol="0" anchor="ctr" wrap="square" lIns="274320" rIns="274320" tIns="182880"/>
           <a:lstStyle/>
           <a:p>
             <a:pPr algn="ctr">
-              <a:defRPr sz="1300" b="1">
+              <a:defRPr sz="1000" b="1">
                 <a:solidFill>
                   <a:srgbClr val="2563EB"/>
                 </a:solidFill>
@@ -5241,15 +5937,15 @@
               </a:defRPr>
             </a:pPr>
             <a:r>
-              <a:t>ШАГ 1</a:t>
-            </a:r>
-          </a:p>
-          <a:p>
-            <a:pPr>
-              <a:spcBef>
-                <a:spcPts val="800"/>
-              </a:spcBef>
-              <a:defRPr sz="1800" b="1">
+              <a:t>ЭТАП 1</a:t>
+            </a:r>
+          </a:p>
+          <a:p>
+            <a:pPr>
+              <a:spcBef>
+                <a:spcPts val="400"/>
+              </a:spcBef>
+              <a:defRPr sz="1500" b="1">
                 <a:solidFill>
                   <a:srgbClr val="0F172A"/>
                 </a:solidFill>
@@ -5257,15 +5953,15 @@
               </a:defRPr>
             </a:pPr>
             <a:r>
-              <a:t>Ввод профиля абитуриента</a:t>
-            </a:r>
-          </a:p>
-          <a:p>
-            <a:pPr>
-              <a:spcBef>
-                <a:spcPts val="1000"/>
-              </a:spcBef>
-              <a:defRPr sz="1200">
+              <a:t>Анкета и диагностика профиля</a:t>
+            </a:r>
+          </a:p>
+          <a:p>
+            <a:pPr>
+              <a:spcBef>
+                <a:spcPts val="400"/>
+              </a:spcBef>
+              <a:defRPr sz="1100">
                 <a:solidFill>
                   <a:srgbClr val="64748B"/>
                 </a:solidFill>
@@ -5273,7 +5969,7 @@
               </a:defRPr>
             </a:pPr>
             <a:r>
-              <a:t>Ученик указывает класс, специальность, GPA, баллы IELTS/SAT/ЕНТ, бюджет и текстовое описание своих внеучебных активностей и достижений.</a:t>
+              <a:t>Ученик указывает класс, специальность, GPA, баллы IELTS/SAT/ЕНТ, бюджет и внеучебные активности. Алгоритм формирует мгновенное резюме сильных сторон и ограничений.</a:t>
             </a:r>
           </a:p>
         </p:txBody>
@@ -5286,8 +5982,8 @@
         </p:nvSpPr>
         <p:spPr>
           <a:xfrm>
-            <a:off x="4389120" y="2011680"/>
-            <a:ext cx="3383280" cy="4114800"/>
+            <a:off x="6126480" y="1783080"/>
+            <a:ext cx="5120640" cy="2057400"/>
           </a:xfrm>
           <a:prstGeom prst="roundRect">
             <a:avLst/>
@@ -5316,11 +6012,11 @@
           </a:fontRef>
         </p:style>
         <p:txBody>
-          <a:bodyPr rtlCol="0" anchor="ctr" wrap="square" lIns="274320" rIns="274320" tIns="274320"/>
+          <a:bodyPr rtlCol="0" anchor="ctr" wrap="square" lIns="274320" rIns="274320" tIns="182880"/>
           <a:lstStyle/>
           <a:p>
             <a:pPr algn="ctr">
-              <a:defRPr sz="1300" b="1">
+              <a:defRPr sz="1000" b="1">
                 <a:solidFill>
                   <a:srgbClr val="2563EB"/>
                 </a:solidFill>
@@ -5328,15 +6024,15 @@
               </a:defRPr>
             </a:pPr>
             <a:r>
-              <a:t>ШАГ 2</a:t>
-            </a:r>
-          </a:p>
-          <a:p>
-            <a:pPr>
-              <a:spcBef>
-                <a:spcPts val="800"/>
-              </a:spcBef>
-              <a:defRPr sz="1800" b="1">
+              <a:t>ЭТАП 2</a:t>
+            </a:r>
+          </a:p>
+          <a:p>
+            <a:pPr>
+              <a:spcBef>
+                <a:spcPts val="400"/>
+              </a:spcBef>
+              <a:defRPr sz="1500" b="1">
                 <a:solidFill>
                   <a:srgbClr val="0F172A"/>
                 </a:solidFill>
@@ -5344,15 +6040,15 @@
               </a:defRPr>
             </a:pPr>
             <a:r>
-              <a:t>Анализ и расчет шансов</a:t>
-            </a:r>
-          </a:p>
-          <a:p>
-            <a:pPr>
-              <a:spcBef>
-                <a:spcPts val="1000"/>
-              </a:spcBef>
-              <a:defRPr sz="1200">
+              <a:t>Сбалансированные рекомендации</a:t>
+            </a:r>
+          </a:p>
+          <a:p>
+            <a:pPr>
+              <a:spcBef>
+                <a:spcPts val="400"/>
+              </a:spcBef>
+              <a:defRPr sz="1100">
                 <a:solidFill>
                   <a:srgbClr val="64748B"/>
                 </a:solidFill>
@@ -5360,7 +6056,7 @@
               </a:defRPr>
             </a:pPr>
             <a:r>
-              <a:t>Алгоритм сопоставляет данные с базой программ, отфильтровывает ложные надежды, выделяет риски отказа и группирует вузы по категориям соответствия.</a:t>
+              <a:t>Каталог из 36+ детальных программ (KZ, Азия, Европа, США) с распределением на Reach, Target и Safety. Возможность сравнения любых 2 вузов по 8 ключевым критериям.</a:t>
             </a:r>
           </a:p>
         </p:txBody>
@@ -5373,8 +6069,8 @@
         </p:nvSpPr>
         <p:spPr>
           <a:xfrm>
-            <a:off x="8046720" y="2011680"/>
-            <a:ext cx="3383280" cy="4114800"/>
+            <a:off x="731520" y="4069080"/>
+            <a:ext cx="5120640" cy="2057400"/>
           </a:xfrm>
           <a:prstGeom prst="roundRect">
             <a:avLst/>
@@ -5403,11 +6099,11 @@
           </a:fontRef>
         </p:style>
         <p:txBody>
-          <a:bodyPr rtlCol="0" anchor="ctr" wrap="square" lIns="274320" rIns="274320" tIns="274320"/>
+          <a:bodyPr rtlCol="0" anchor="ctr" wrap="square" lIns="274320" rIns="274320" tIns="182880"/>
           <a:lstStyle/>
           <a:p>
             <a:pPr algn="ctr">
-              <a:defRPr sz="1300" b="1">
+              <a:defRPr sz="1000" b="1">
                 <a:solidFill>
                   <a:srgbClr val="2563EB"/>
                 </a:solidFill>
@@ -5415,15 +6111,15 @@
               </a:defRPr>
             </a:pPr>
             <a:r>
-              <a:t>ШАГ 3</a:t>
-            </a:r>
-          </a:p>
-          <a:p>
-            <a:pPr>
-              <a:spcBef>
-                <a:spcPts val="800"/>
-              </a:spcBef>
-              <a:defRPr sz="1800" b="1">
+              <a:t>ЭТАП 3</a:t>
+            </a:r>
+          </a:p>
+          <a:p>
+            <a:pPr>
+              <a:spcBef>
+                <a:spcPts val="400"/>
+              </a:spcBef>
+              <a:defRPr sz="1500" b="1">
                 <a:solidFill>
                   <a:srgbClr val="0F172A"/>
                 </a:solidFill>
@@ -5431,15 +6127,15 @@
               </a:defRPr>
             </a:pPr>
             <a:r>
-              <a:t>Индивидуальный роадмап</a:t>
-            </a:r>
-          </a:p>
-          <a:p>
-            <a:pPr>
-              <a:spcBef>
-                <a:spcPts val="1000"/>
-              </a:spcBef>
-              <a:defRPr sz="1200">
+              <a:t>Живой AI-поиск любого вуза мира</a:t>
+            </a:r>
+          </a:p>
+          <a:p>
+            <a:pPr>
+              <a:spcBef>
+                <a:spcPts val="400"/>
+              </a:spcBef>
+              <a:defRPr sz="1100">
                 <a:solidFill>
                   <a:srgbClr val="64748B"/>
                 </a:solidFill>
@@ -5447,7 +6143,94 @@
               </a:defRPr>
             </a:pPr>
             <a:r>
-              <a:t>Абитуриент получает персональный таймлайн с дедлайнами, пошаговый чек-лист документов и готовый каркас мотивационного эссе под выбранный вуз.</a:t>
+              <a:t>Ввод названия любого университета (Тренто, Bocconi, Waterloo, КБТУ, СДУ) — Gemini 3.6 Flash мгновенно выдает точную карточку с волнами, грантами и персональным шансом.</a:t>
+            </a:r>
+          </a:p>
+        </p:txBody>
+      </p:sp>
+      <p:sp>
+        <p:nvSpPr>
+          <p:cNvPr id="9" name="Rounded Rectangle 8"/>
+          <p:cNvSpPr/>
+          <p:nvPr/>
+        </p:nvSpPr>
+        <p:spPr>
+          <a:xfrm>
+            <a:off x="6126480" y="4069080"/>
+            <a:ext cx="5120640" cy="2057400"/>
+          </a:xfrm>
+          <a:prstGeom prst="roundRect">
+            <a:avLst/>
+          </a:prstGeom>
+          <a:solidFill>
+            <a:srgbClr val="FFFFFF"/>
+          </a:solidFill>
+          <a:ln>
+            <a:solidFill>
+              <a:srgbClr val="E2E8F0"/>
+            </a:solidFill>
+          </a:ln>
+        </p:spPr>
+        <p:style>
+          <a:lnRef idx="1">
+            <a:schemeClr val="accent1"/>
+          </a:lnRef>
+          <a:fillRef idx="3">
+            <a:schemeClr val="accent1"/>
+          </a:fillRef>
+          <a:effectRef idx="2">
+            <a:schemeClr val="accent1"/>
+          </a:effectRef>
+          <a:fontRef idx="minor">
+            <a:schemeClr val="lt1"/>
+          </a:fontRef>
+        </p:style>
+        <p:txBody>
+          <a:bodyPr rtlCol="0" anchor="ctr" wrap="square" lIns="274320" rIns="274320" tIns="182880"/>
+          <a:lstStyle/>
+          <a:p>
+            <a:pPr algn="ctr">
+              <a:defRPr sz="1000" b="1">
+                <a:solidFill>
+                  <a:srgbClr val="2563EB"/>
+                </a:solidFill>
+                <a:latin typeface="Arial"/>
+              </a:defRPr>
+            </a:pPr>
+            <a:r>
+              <a:t>ЭТАП 4</a:t>
+            </a:r>
+          </a:p>
+          <a:p>
+            <a:pPr>
+              <a:spcBef>
+                <a:spcPts val="400"/>
+              </a:spcBef>
+              <a:defRPr sz="1500" b="1">
+                <a:solidFill>
+                  <a:srgbClr val="0F172A"/>
+                </a:solidFill>
+                <a:latin typeface="Arial"/>
+              </a:defRPr>
+            </a:pPr>
+            <a:r>
+              <a:t>Канбан-трекер, эссе, бот и шеринг</a:t>
+            </a:r>
+          </a:p>
+          <a:p>
+            <a:pPr>
+              <a:spcBef>
+                <a:spcPts val="400"/>
+              </a:spcBef>
+              <a:defRPr sz="1100">
+                <a:solidFill>
+                  <a:srgbClr val="64748B"/>
+                </a:solidFill>
+                <a:latin typeface="Arial"/>
+              </a:defRPr>
+            </a:pPr>
+            <a:r>
+              <a:t>Индивидуальный роадмап дедлайнов, экспорт в календарь (.ics), генератор каркаса эссе, Telegram-бот с уведомлениями и ссылки доступа для родителей и менторов.</a:t>
             </a:r>
           </a:p>
         </p:txBody>
@@ -5521,8 +6304,8 @@
         </p:nvSpPr>
         <p:spPr>
           <a:xfrm>
-            <a:off x="731520" y="457200"/>
-            <a:ext cx="10515600" cy="320040"/>
+            <a:off x="731520" y="411480"/>
+            <a:ext cx="10698480" cy="292608"/>
           </a:xfrm>
           <a:prstGeom prst="rect">
             <a:avLst/>
@@ -5544,7 +6327,7 @@
               </a:defRPr>
             </a:pPr>
             <a:r>
-              <a:t>РЫНОЧНЫЙ ПОТЕНЦИАЛ</a:t>
+              <a:t>5. КОНКУРЕНТНЫЙ АНАЛИЗ</a:t>
             </a:r>
           </a:p>
         </p:txBody>
@@ -5557,8 +6340,8 @@
         </p:nvSpPr>
         <p:spPr>
           <a:xfrm>
-            <a:off x="731520" y="777240"/>
-            <a:ext cx="10515600" cy="548640"/>
+            <a:off x="731520" y="731520"/>
+            <a:ext cx="10698480" cy="502920"/>
           </a:xfrm>
           <a:prstGeom prst="rect">
             <a:avLst/>
@@ -5572,7 +6355,7 @@
           <a:lstStyle/>
           <a:p>
             <a:pPr>
-              <a:defRPr sz="2400" b="1">
+              <a:defRPr sz="2200" b="1">
                 <a:solidFill>
                   <a:srgbClr val="0F172A"/>
                 </a:solidFill>
@@ -5580,7 +6363,7 @@
               </a:defRPr>
             </a:pPr>
             <a:r>
-              <a:t>Объем рынка и растущий спрос на зарубежное образование</a:t>
+              <a:t>Почему AdmitRoute побеждает альтернативы на рынке?</a:t>
             </a:r>
           </a:p>
         </p:txBody>
@@ -5593,8 +6376,8 @@
         </p:nvSpPr>
         <p:spPr>
           <a:xfrm>
-            <a:off x="731520" y="1325880"/>
-            <a:ext cx="10515600" cy="365760"/>
+            <a:off x="731520" y="1261872"/>
+            <a:ext cx="10698480" cy="365760"/>
           </a:xfrm>
           <a:prstGeom prst="rect">
             <a:avLst/>
@@ -5608,7 +6391,7 @@
           <a:lstStyle/>
           <a:p>
             <a:pPr>
-              <a:defRPr sz="1300">
+              <a:defRPr sz="1200">
                 <a:solidFill>
                   <a:srgbClr val="64748B"/>
                 </a:solidFill>
@@ -5616,7 +6399,7 @@
               </a:defRPr>
             </a:pPr>
             <a:r>
-              <a:t>Казахстан и Центральная Азия демонстрируют рекордный интерес к высшему образованию и грантам.</a:t>
+              <a:t>Сравнение с традиционным консалтингом, обычными чат-ботами общего назначения и сайтами вузов.</a:t>
             </a:r>
           </a:p>
         </p:txBody>
@@ -5629,8 +6412,8 @@
         </p:nvSpPr>
         <p:spPr>
           <a:xfrm>
-            <a:off x="731520" y="1920240"/>
-            <a:ext cx="5120640" cy="1965960"/>
+            <a:off x="731520" y="1783080"/>
+            <a:ext cx="2542032" cy="4572000"/>
           </a:xfrm>
           <a:prstGeom prst="roundRect">
             <a:avLst/>
@@ -5638,7 +6421,7 @@
           <a:solidFill>
             <a:srgbClr val="FFFFFF"/>
           </a:solidFill>
-          <a:ln>
+          <a:ln w="12700">
             <a:solidFill>
               <a:srgbClr val="E2E8F0"/>
             </a:solidFill>
@@ -5659,19 +6442,35 @@
           </a:fontRef>
         </p:style>
         <p:txBody>
-          <a:bodyPr rtlCol="0" anchor="ctr" wrap="square" lIns="274320" rIns="274320" tIns="182880"/>
+          <a:bodyPr rtlCol="0" anchor="ctr" wrap="square" lIns="182880" rIns="182880" tIns="182880"/>
           <a:lstStyle/>
           <a:p>
             <a:pPr algn="ctr">
-              <a:defRPr sz="3200" b="1">
-                <a:solidFill>
-                  <a:srgbClr val="2563EB"/>
-                </a:solidFill>
-                <a:latin typeface="Arial"/>
-              </a:defRPr>
-            </a:pPr>
-            <a:r>
-              <a:t>180 000+</a:t>
+              <a:defRPr sz="850" b="1">
+                <a:solidFill>
+                  <a:srgbClr val="64748B"/>
+                </a:solidFill>
+                <a:latin typeface="Arial"/>
+              </a:defRPr>
+            </a:pPr>
+            <a:r>
+              <a:t>ТРАДИЦИОННЫЙ КОНСАЛТИНГ</a:t>
+            </a:r>
+          </a:p>
+          <a:p>
+            <a:pPr>
+              <a:spcBef>
+                <a:spcPts val="300"/>
+              </a:spcBef>
+              <a:defRPr sz="1350" b="1">
+                <a:solidFill>
+                  <a:srgbClr val="0F172A"/>
+                </a:solidFill>
+                <a:latin typeface="Arial"/>
+              </a:defRPr>
+            </a:pPr>
+            <a:r>
+              <a:t>Агентства поступления</a:t>
             </a:r>
           </a:p>
           <a:p>
@@ -5679,7 +6478,7 @@
               <a:spcBef>
                 <a:spcPts val="400"/>
               </a:spcBef>
-              <a:defRPr sz="1300" b="1">
+              <a:defRPr sz="1500" b="1">
                 <a:solidFill>
                   <a:srgbClr val="0F172A"/>
                 </a:solidFill>
@@ -5687,15 +6486,12 @@
               </a:defRPr>
             </a:pPr>
             <a:r>
-              <a:t>Выпускников школ в Казахстане ежегодно (TAM)</a:t>
-            </a:r>
-          </a:p>
-          <a:p>
-            <a:pPr>
-              <a:spcBef>
-                <a:spcPts val="400"/>
-              </a:spcBef>
-              <a:defRPr sz="1100">
+              <a:t>$1,500 – $4,000</a:t>
+            </a:r>
+          </a:p>
+          <a:p>
+            <a:pPr>
+              <a:defRPr sz="900">
                 <a:solidFill>
                   <a:srgbClr val="64748B"/>
                 </a:solidFill>
@@ -5703,7 +6499,103 @@
               </a:defRPr>
             </a:pPr>
             <a:r>
-              <a:t>Ежегодный растущий поток абитуриентов, выбирающих высшее образование</a:t>
+              <a:t>за сопровождение 1 абитуриента</a:t>
+            </a:r>
+          </a:p>
+          <a:p>
+            <a:pPr>
+              <a:spcBef>
+                <a:spcPts val="500"/>
+              </a:spcBef>
+              <a:defRPr sz="900">
+                <a:solidFill>
+                  <a:srgbClr val="475569"/>
+                </a:solidFill>
+                <a:latin typeface="Arial"/>
+              </a:defRPr>
+            </a:pPr>
+            <a:r>
+              <a:t>✕ Заоблачная стоимость для 95% семей</a:t>
+            </a:r>
+          </a:p>
+          <a:p>
+            <a:pPr>
+              <a:spcBef>
+                <a:spcPts val="500"/>
+              </a:spcBef>
+              <a:defRPr sz="900">
+                <a:solidFill>
+                  <a:srgbClr val="475569"/>
+                </a:solidFill>
+                <a:latin typeface="Arial"/>
+              </a:defRPr>
+            </a:pPr>
+            <a:r>
+              <a:t>✕ Навязывают платные вузы за комиссию</a:t>
+            </a:r>
+          </a:p>
+          <a:p>
+            <a:pPr>
+              <a:spcBef>
+                <a:spcPts val="500"/>
+              </a:spcBef>
+              <a:defRPr sz="900">
+                <a:solidFill>
+                  <a:srgbClr val="475569"/>
+                </a:solidFill>
+                <a:latin typeface="Arial"/>
+              </a:defRPr>
+            </a:pPr>
+            <a:r>
+              <a:t>✕ Субъективная оценка «на глаз» куратора</a:t>
+            </a:r>
+          </a:p>
+          <a:p>
+            <a:pPr>
+              <a:spcBef>
+                <a:spcPts val="500"/>
+              </a:spcBef>
+              <a:defRPr sz="900">
+                <a:solidFill>
+                  <a:srgbClr val="475569"/>
+                </a:solidFill>
+                <a:latin typeface="Arial"/>
+              </a:defRPr>
+            </a:pPr>
+            <a:r>
+              <a:t>✕ Долгие ручные созвоны и бюрократия</a:t>
+            </a:r>
+          </a:p>
+          <a:p>
+            <a:pPr>
+              <a:spcBef>
+                <a:spcPts val="500"/>
+              </a:spcBef>
+              <a:defRPr sz="900">
+                <a:solidFill>
+                  <a:srgbClr val="475569"/>
+                </a:solidFill>
+                <a:latin typeface="Arial"/>
+              </a:defRPr>
+            </a:pPr>
+            <a:r>
+              <a:t>✕ Нет объективной гарантии гранта</a:t>
+            </a:r>
+          </a:p>
+          <a:p>
+            <a:pPr>
+              <a:spcBef>
+                <a:spcPts val="1200"/>
+              </a:spcBef>
+              <a:defRPr sz="950" b="1">
+                <a:solidFill>
+                  <a:srgbClr val="E11D48"/>
+                </a:solidFill>
+                <a:latin typeface="Arial"/>
+              </a:defRPr>
+            </a:pPr>
+            <a:r>
+              <a:t>ИТОГ: Дорого и ангажированно</a:t>
             </a:r>
           </a:p>
         </p:txBody>
@@ -5716,8 +6608,8 @@
         </p:nvSpPr>
         <p:spPr>
           <a:xfrm>
-            <a:off x="6126480" y="1920240"/>
-            <a:ext cx="5120640" cy="1965960"/>
+            <a:off x="3456432" y="1783080"/>
+            <a:ext cx="2542032" cy="4572000"/>
           </a:xfrm>
           <a:prstGeom prst="roundRect">
             <a:avLst/>
@@ -5725,7 +6617,7 @@
           <a:solidFill>
             <a:srgbClr val="FFFFFF"/>
           </a:solidFill>
-          <a:ln>
+          <a:ln w="12700">
             <a:solidFill>
               <a:srgbClr val="E2E8F0"/>
             </a:solidFill>
@@ -5746,19 +6638,35 @@
           </a:fontRef>
         </p:style>
         <p:txBody>
-          <a:bodyPr rtlCol="0" anchor="ctr" wrap="square" lIns="274320" rIns="274320" tIns="182880"/>
+          <a:bodyPr rtlCol="0" anchor="ctr" wrap="square" lIns="182880" rIns="182880" tIns="182880"/>
           <a:lstStyle/>
           <a:p>
             <a:pPr algn="ctr">
-              <a:defRPr sz="3200" b="1">
-                <a:solidFill>
-                  <a:srgbClr val="2563EB"/>
-                </a:solidFill>
-                <a:latin typeface="Arial"/>
-              </a:defRPr>
-            </a:pPr>
-            <a:r>
-              <a:t>35 000+</a:t>
+              <a:defRPr sz="850" b="1">
+                <a:solidFill>
+                  <a:srgbClr val="64748B"/>
+                </a:solidFill>
+                <a:latin typeface="Arial"/>
+              </a:defRPr>
+            </a:pPr>
+            <a:r>
+              <a:t>ОБЫЧНЫЕ ЧАТ-БОТЫ (ИИ)</a:t>
+            </a:r>
+          </a:p>
+          <a:p>
+            <a:pPr>
+              <a:spcBef>
+                <a:spcPts val="300"/>
+              </a:spcBef>
+              <a:defRPr sz="1350" b="1">
+                <a:solidFill>
+                  <a:srgbClr val="0F172A"/>
+                </a:solidFill>
+                <a:latin typeface="Arial"/>
+              </a:defRPr>
+            </a:pPr>
+            <a:r>
+              <a:t>ChatGPT / Claude / Gemini</a:t>
             </a:r>
           </a:p>
           <a:p>
@@ -5766,7 +6674,7 @@
               <a:spcBef>
                 <a:spcPts val="400"/>
               </a:spcBef>
-              <a:defRPr sz="1300" b="1">
+              <a:defRPr sz="1500" b="1">
                 <a:solidFill>
                   <a:srgbClr val="0F172A"/>
                 </a:solidFill>
@@ -5774,15 +6682,12 @@
               </a:defRPr>
             </a:pPr>
             <a:r>
-              <a:t>Абитуриентов, поступающих за рубеж (SAM)</a:t>
-            </a:r>
-          </a:p>
-          <a:p>
-            <a:pPr>
-              <a:spcBef>
-                <a:spcPts val="400"/>
-              </a:spcBef>
-              <a:defRPr sz="1100">
+              <a:t>$0 – $20 / мес</a:t>
+            </a:r>
+          </a:p>
+          <a:p>
+            <a:pPr>
+              <a:defRPr sz="900">
                 <a:solidFill>
                   <a:srgbClr val="64748B"/>
                 </a:solidFill>
@@ -5790,7 +6695,103 @@
               </a:defRPr>
             </a:pPr>
             <a:r>
-              <a:t>Высокий спрос на обучение в Европе, США, Турции, Азии и странах СНГ</a:t>
+              <a:t>подписка на веб-сервисы</a:t>
+            </a:r>
+          </a:p>
+          <a:p>
+            <a:pPr>
+              <a:spcBef>
+                <a:spcPts val="500"/>
+              </a:spcBef>
+              <a:defRPr sz="900">
+                <a:solidFill>
+                  <a:srgbClr val="475569"/>
+                </a:solidFill>
+                <a:latin typeface="Arial"/>
+              </a:defRPr>
+            </a:pPr>
+            <a:r>
+              <a:t>✕ Галлюцинации и выдуманные требования</a:t>
+            </a:r>
+          </a:p>
+          <a:p>
+            <a:pPr>
+              <a:spcBef>
+                <a:spcPts val="500"/>
+              </a:spcBef>
+              <a:defRPr sz="900">
+                <a:solidFill>
+                  <a:srgbClr val="475569"/>
+                </a:solidFill>
+                <a:latin typeface="Arial"/>
+              </a:defRPr>
+            </a:pPr>
+            <a:r>
+              <a:t>✕ Не знают порогов ЕНТ и квот РК</a:t>
+            </a:r>
+          </a:p>
+          <a:p>
+            <a:pPr>
+              <a:spcBef>
+                <a:spcPts val="500"/>
+              </a:spcBef>
+              <a:defRPr sz="900">
+                <a:solidFill>
+                  <a:srgbClr val="475569"/>
+                </a:solidFill>
+                <a:latin typeface="Arial"/>
+              </a:defRPr>
+            </a:pPr>
+            <a:r>
+              <a:t>✕ Нет математического расчета шансов</a:t>
+            </a:r>
+          </a:p>
+          <a:p>
+            <a:pPr>
+              <a:spcBef>
+                <a:spcPts val="500"/>
+              </a:spcBef>
+              <a:defRPr sz="900">
+                <a:solidFill>
+                  <a:srgbClr val="475569"/>
+                </a:solidFill>
+                <a:latin typeface="Arial"/>
+              </a:defRPr>
+            </a:pPr>
+            <a:r>
+              <a:t>✕ Нет интерактивного роадмапа и календаря</a:t>
+            </a:r>
+          </a:p>
+          <a:p>
+            <a:pPr>
+              <a:spcBef>
+                <a:spcPts val="500"/>
+              </a:spcBef>
+              <a:defRPr sz="900">
+                <a:solidFill>
+                  <a:srgbClr val="475569"/>
+                </a:solidFill>
+                <a:latin typeface="Arial"/>
+              </a:defRPr>
+            </a:pPr>
+            <a:r>
+              <a:t>✕ Нет шеринга родителям и Telegram-бота</a:t>
+            </a:r>
+          </a:p>
+          <a:p>
+            <a:pPr>
+              <a:spcBef>
+                <a:spcPts val="1200"/>
+              </a:spcBef>
+              <a:defRPr sz="950" b="1">
+                <a:solidFill>
+                  <a:srgbClr val="E11D48"/>
+                </a:solidFill>
+                <a:latin typeface="Arial"/>
+              </a:defRPr>
+            </a:pPr>
+            <a:r>
+              <a:t>ИТОГ: Риск дезинформации</a:t>
             </a:r>
           </a:p>
         </p:txBody>
@@ -5803,8 +6804,8 @@
         </p:nvSpPr>
         <p:spPr>
           <a:xfrm>
-            <a:off x="731520" y="4114800"/>
-            <a:ext cx="5120640" cy="1965960"/>
+            <a:off x="6181344" y="1783080"/>
+            <a:ext cx="2542032" cy="4572000"/>
           </a:xfrm>
           <a:prstGeom prst="roundRect">
             <a:avLst/>
@@ -5812,7 +6813,7 @@
           <a:solidFill>
             <a:srgbClr val="FFFFFF"/>
           </a:solidFill>
-          <a:ln>
+          <a:ln w="12700">
             <a:solidFill>
               <a:srgbClr val="E2E8F0"/>
             </a:solidFill>
@@ -5833,19 +6834,35 @@
           </a:fontRef>
         </p:style>
         <p:txBody>
-          <a:bodyPr rtlCol="0" anchor="ctr" wrap="square" lIns="274320" rIns="274320" tIns="182880"/>
+          <a:bodyPr rtlCol="0" anchor="ctr" wrap="square" lIns="182880" rIns="182880" tIns="182880"/>
           <a:lstStyle/>
           <a:p>
             <a:pPr algn="ctr">
-              <a:defRPr sz="3200" b="1">
-                <a:solidFill>
-                  <a:srgbClr val="2563EB"/>
-                </a:solidFill>
-                <a:latin typeface="Arial"/>
-              </a:defRPr>
-            </a:pPr>
-            <a:r>
-              <a:t>75 000+</a:t>
+              <a:defRPr sz="850" b="1">
+                <a:solidFill>
+                  <a:srgbClr val="64748B"/>
+                </a:solidFill>
+                <a:latin typeface="Arial"/>
+              </a:defRPr>
+            </a:pPr>
+            <a:r>
+              <a:t>КАТАЛОГИ И САЙТЫ ВУЗОВ</a:t>
+            </a:r>
+          </a:p>
+          <a:p>
+            <a:pPr>
+              <a:spcBef>
+                <a:spcPts val="300"/>
+              </a:spcBef>
+              <a:defRPr sz="1350" b="1">
+                <a:solidFill>
+                  <a:srgbClr val="0F172A"/>
+                </a:solidFill>
+                <a:latin typeface="Arial"/>
+              </a:defRPr>
+            </a:pPr>
+            <a:r>
+              <a:t>Kundelik, сайты вузов</a:t>
             </a:r>
           </a:p>
           <a:p>
@@ -5853,7 +6870,7 @@
               <a:spcBef>
                 <a:spcPts val="400"/>
               </a:spcBef>
-              <a:defRPr sz="1300" b="1">
+              <a:defRPr sz="1500" b="1">
                 <a:solidFill>
                   <a:srgbClr val="0F172A"/>
                 </a:solidFill>
@@ -5861,15 +6878,12 @@
               </a:defRPr>
             </a:pPr>
             <a:r>
-              <a:t>Государственных образовательных грантов в РК</a:t>
-            </a:r>
-          </a:p>
-          <a:p>
-            <a:pPr>
-              <a:spcBef>
-                <a:spcPts val="400"/>
-              </a:spcBef>
-              <a:defRPr sz="1100">
+              <a:t>0 ₸ (Бесплатно)</a:t>
+            </a:r>
+          </a:p>
+          <a:p>
+            <a:pPr>
+              <a:defRPr sz="900">
                 <a:solidFill>
                   <a:srgbClr val="64748B"/>
                 </a:solidFill>
@@ -5877,7 +6891,103 @@
               </a:defRPr>
             </a:pPr>
             <a:r>
-              <a:t>Острая конкуренция за квоты требует точного расчета шансов по проходным баллам</a:t>
+              <a:t>открытые веб-страницы</a:t>
+            </a:r>
+          </a:p>
+          <a:p>
+            <a:pPr>
+              <a:spcBef>
+                <a:spcPts val="500"/>
+              </a:spcBef>
+              <a:defRPr sz="900">
+                <a:solidFill>
+                  <a:srgbClr val="475569"/>
+                </a:solidFill>
+                <a:latin typeface="Arial"/>
+              </a:defRPr>
+            </a:pPr>
+            <a:r>
+              <a:t>✕ Разрозненный хаос на сотнях сайтов</a:t>
+            </a:r>
+          </a:p>
+          <a:p>
+            <a:pPr>
+              <a:spcBef>
+                <a:spcPts val="500"/>
+              </a:spcBef>
+              <a:defRPr sz="900">
+                <a:solidFill>
+                  <a:srgbClr val="475569"/>
+                </a:solidFill>
+                <a:latin typeface="Arial"/>
+              </a:defRPr>
+            </a:pPr>
+            <a:r>
+              <a:t>✕ Устаревшие правила и даты волн</a:t>
+            </a:r>
+          </a:p>
+          <a:p>
+            <a:pPr>
+              <a:spcBef>
+                <a:spcPts val="500"/>
+              </a:spcBef>
+              <a:defRPr sz="900">
+                <a:solidFill>
+                  <a:srgbClr val="475569"/>
+                </a:solidFill>
+                <a:latin typeface="Arial"/>
+              </a:defRPr>
+            </a:pPr>
+            <a:r>
+              <a:t>✕ Нет адаптации под баллы студента</a:t>
+            </a:r>
+          </a:p>
+          <a:p>
+            <a:pPr>
+              <a:spcBef>
+                <a:spcPts val="500"/>
+              </a:spcBef>
+              <a:defRPr sz="900">
+                <a:solidFill>
+                  <a:srgbClr val="475569"/>
+                </a:solidFill>
+                <a:latin typeface="Arial"/>
+              </a:defRPr>
+            </a:pPr>
+            <a:r>
+              <a:t>✕ Нет защиты от ложных надежд</a:t>
+            </a:r>
+          </a:p>
+          <a:p>
+            <a:pPr>
+              <a:spcBef>
+                <a:spcPts val="500"/>
+              </a:spcBef>
+              <a:defRPr sz="900">
+                <a:solidFill>
+                  <a:srgbClr val="475569"/>
+                </a:solidFill>
+                <a:latin typeface="Arial"/>
+              </a:defRPr>
+            </a:pPr>
+            <a:r>
+              <a:t>✕ 120+ часов на ручной поиск данных</a:t>
+            </a:r>
+          </a:p>
+          <a:p>
+            <a:pPr>
+              <a:spcBef>
+                <a:spcPts val="1200"/>
+              </a:spcBef>
+              <a:defRPr sz="950" b="1">
+                <a:solidFill>
+                  <a:srgbClr val="E11D48"/>
+                </a:solidFill>
+                <a:latin typeface="Arial"/>
+              </a:defRPr>
+            </a:pPr>
+            <a:r>
+              <a:t>ИТОГ: Информационный хаос</a:t>
             </a:r>
           </a:p>
         </p:txBody>
@@ -5890,18 +7000,18 @@
         </p:nvSpPr>
         <p:spPr>
           <a:xfrm>
-            <a:off x="6126480" y="4114800"/>
-            <a:ext cx="5120640" cy="1965960"/>
+            <a:off x="8906256" y="1783080"/>
+            <a:ext cx="2542032" cy="4572000"/>
           </a:xfrm>
           <a:prstGeom prst="roundRect">
             <a:avLst/>
           </a:prstGeom>
           <a:solidFill>
-            <a:srgbClr val="FFFFFF"/>
+            <a:srgbClr val="EEF2FF"/>
           </a:solidFill>
-          <a:ln>
+          <a:ln w="25400">
             <a:solidFill>
-              <a:srgbClr val="E2E8F0"/>
+              <a:srgbClr val="2563EB"/>
             </a:solidFill>
           </a:ln>
         </p:spPr>
@@ -5920,11 +7030,11 @@
           </a:fontRef>
         </p:style>
         <p:txBody>
-          <a:bodyPr rtlCol="0" anchor="ctr" wrap="square" lIns="274320" rIns="274320" tIns="182880"/>
+          <a:bodyPr rtlCol="0" anchor="ctr" wrap="square" lIns="182880" rIns="182880" tIns="182880"/>
           <a:lstStyle/>
           <a:p>
             <a:pPr algn="ctr">
-              <a:defRPr sz="3200" b="1">
+              <a:defRPr sz="850" b="1">
                 <a:solidFill>
                   <a:srgbClr val="2563EB"/>
                 </a:solidFill>
@@ -5932,7 +7042,23 @@
               </a:defRPr>
             </a:pPr>
             <a:r>
-              <a:t>+38%</a:t>
+              <a:t>НАШЕ ПРЕИМУЩЕСТВО</a:t>
+            </a:r>
+          </a:p>
+          <a:p>
+            <a:pPr>
+              <a:spcBef>
+                <a:spcPts val="300"/>
+              </a:spcBef>
+              <a:defRPr sz="1350" b="1">
+                <a:solidFill>
+                  <a:srgbClr val="2563EB"/>
+                </a:solidFill>
+                <a:latin typeface="Arial"/>
+              </a:defRPr>
+            </a:pPr>
+            <a:r>
+              <a:t>AdmitRoute (Победитель)</a:t>
             </a:r>
           </a:p>
           <a:p>
@@ -5940,7 +7066,7 @@
               <a:spcBef>
                 <a:spcPts val="400"/>
               </a:spcBef>
-              <a:defRPr sz="1300" b="1">
+              <a:defRPr sz="1500" b="1">
                 <a:solidFill>
                   <a:srgbClr val="0F172A"/>
                 </a:solidFill>
@@ -5948,15 +7074,12 @@
               </a:defRPr>
             </a:pPr>
             <a:r>
-              <a:t>Ежегодный рост запросов на стипендии (SOM)</a:t>
-            </a:r>
-          </a:p>
-          <a:p>
-            <a:pPr>
-              <a:spcBef>
-                <a:spcPts val="400"/>
-              </a:spcBef>
-              <a:defRPr sz="1100">
+              <a:t>0 ₸ / 4 990 ₸ мес</a:t>
+            </a:r>
+          </a:p>
+          <a:p>
+            <a:pPr>
+              <a:defRPr sz="900">
                 <a:solidFill>
                   <a:srgbClr val="64748B"/>
                 </a:solidFill>
@@ -5964,7 +7087,103 @@
               </a:defRPr>
             </a:pPr>
             <a:r>
-              <a:t>Стремительный рост интереса к грантовым программам: DSU, Stipendium, CSC</a:t>
+              <a:t>Freemium + доступный PRO</a:t>
+            </a:r>
+          </a:p>
+          <a:p>
+            <a:pPr>
+              <a:spcBef>
+                <a:spcPts val="500"/>
+              </a:spcBef>
+              <a:defRPr sz="900" b="1">
+                <a:solidFill>
+                  <a:srgbClr val="0F172A"/>
+                </a:solidFill>
+                <a:latin typeface="Arial"/>
+              </a:defRPr>
+            </a:pPr>
+            <a:r>
+              <a:t>✓ Математический скоринг шансов в %</a:t>
+            </a:r>
+          </a:p>
+          <a:p>
+            <a:pPr>
+              <a:spcBef>
+                <a:spcPts val="500"/>
+              </a:spcBef>
+              <a:defRPr sz="900" b="1">
+                <a:solidFill>
+                  <a:srgbClr val="0F172A"/>
+                </a:solidFill>
+                <a:latin typeface="Arial"/>
+              </a:defRPr>
+            </a:pPr>
+            <a:r>
+              <a:t>✓ Алгоритм «Анти-иллюзия» против отказа</a:t>
+            </a:r>
+          </a:p>
+          <a:p>
+            <a:pPr>
+              <a:spcBef>
+                <a:spcPts val="500"/>
+              </a:spcBef>
+              <a:defRPr sz="900" b="1">
+                <a:solidFill>
+                  <a:srgbClr val="0F172A"/>
+                </a:solidFill>
+                <a:latin typeface="Arial"/>
+              </a:defRPr>
+            </a:pPr>
+            <a:r>
+              <a:t>✓ База РК и мира + живой AI-поиск</a:t>
+            </a:r>
+          </a:p>
+          <a:p>
+            <a:pPr>
+              <a:spcBef>
+                <a:spcPts val="500"/>
+              </a:spcBef>
+              <a:defRPr sz="900" b="1">
+                <a:solidFill>
+                  <a:srgbClr val="0F172A"/>
+                </a:solidFill>
+                <a:latin typeface="Arial"/>
+              </a:defRPr>
+            </a:pPr>
+            <a:r>
+              <a:t>✓ Дедлайны в iCal + Telegram-напоминания</a:t>
+            </a:r>
+          </a:p>
+          <a:p>
+            <a:pPr>
+              <a:spcBef>
+                <a:spcPts val="500"/>
+              </a:spcBef>
+              <a:defRPr sz="900" b="1">
+                <a:solidFill>
+                  <a:srgbClr val="0F172A"/>
+                </a:solidFill>
+                <a:latin typeface="Arial"/>
+              </a:defRPr>
+            </a:pPr>
+            <a:r>
+              <a:t>✓ Шеринг-ссылки для родителей и менторов</a:t>
+            </a:r>
+          </a:p>
+          <a:p>
+            <a:pPr>
+              <a:spcBef>
+                <a:spcPts val="1200"/>
+              </a:spcBef>
+              <a:defRPr sz="950" b="1">
+                <a:solidFill>
+                  <a:srgbClr val="2563EB"/>
+                </a:solidFill>
+                <a:latin typeface="Arial"/>
+              </a:defRPr>
+            </a:pPr>
+            <a:r>
+              <a:t>ИТОГ: Честно, точно и доступно</a:t>
             </a:r>
           </a:p>
         </p:txBody>
@@ -6038,8 +7257,8 @@
         </p:nvSpPr>
         <p:spPr>
           <a:xfrm>
-            <a:off x="731520" y="457200"/>
-            <a:ext cx="10515600" cy="320040"/>
+            <a:off x="731520" y="411480"/>
+            <a:ext cx="10698480" cy="292608"/>
           </a:xfrm>
           <a:prstGeom prst="rect">
             <a:avLst/>
@@ -6061,7 +7280,7 @@
               </a:defRPr>
             </a:pPr>
             <a:r>
-              <a:t>БИЗНЕС-МОДЕЛЬ</a:t>
+              <a:t>6. РЫНОЧНЫЙ ПОТЕНЦИАЛ</a:t>
             </a:r>
           </a:p>
         </p:txBody>
@@ -6074,8 +7293,8 @@
         </p:nvSpPr>
         <p:spPr>
           <a:xfrm>
-            <a:off x="731520" y="777240"/>
-            <a:ext cx="10515600" cy="548640"/>
+            <a:off x="731520" y="731520"/>
+            <a:ext cx="10698480" cy="502920"/>
           </a:xfrm>
           <a:prstGeom prst="rect">
             <a:avLst/>
@@ -6089,7 +7308,7 @@
           <a:lstStyle/>
           <a:p>
             <a:pPr>
-              <a:defRPr sz="2400" b="1">
+              <a:defRPr sz="2200" b="1">
                 <a:solidFill>
                   <a:srgbClr val="0F172A"/>
                 </a:solidFill>
@@ -6097,7 +7316,7 @@
               </a:defRPr>
             </a:pPr>
             <a:r>
-              <a:t>Монетизация: B2C подписка и B2B партнерства</a:t>
+              <a:t>Объем рынка и растущий спрос на высшее образование</a:t>
             </a:r>
           </a:p>
         </p:txBody>
@@ -6110,8 +7329,8 @@
         </p:nvSpPr>
         <p:spPr>
           <a:xfrm>
-            <a:off x="731520" y="1325880"/>
-            <a:ext cx="10515600" cy="365760"/>
+            <a:off x="731520" y="1261872"/>
+            <a:ext cx="10698480" cy="365760"/>
           </a:xfrm>
           <a:prstGeom prst="rect">
             <a:avLst/>
@@ -6125,7 +7344,7 @@
           <a:lstStyle/>
           <a:p>
             <a:pPr>
-              <a:defRPr sz="1300">
+              <a:defRPr sz="1200">
                 <a:solidFill>
                   <a:srgbClr val="64748B"/>
                 </a:solidFill>
@@ -6133,7 +7352,7 @@
               </a:defRPr>
             </a:pPr>
             <a:r>
-              <a:t>Сбалансированная модель с низким порогом входа и высокой ценностью для клиентов.</a:t>
+              <a:t>Казахстан и Центральная Азия демонстрируют рекордный спрос на гранты и зарубежное образование.</a:t>
             </a:r>
           </a:p>
         </p:txBody>
@@ -6146,8 +7365,8 @@
         </p:nvSpPr>
         <p:spPr>
           <a:xfrm>
-            <a:off x="731520" y="1920240"/>
-            <a:ext cx="3383280" cy="4297680"/>
+            <a:off x="731520" y="1783080"/>
+            <a:ext cx="5120640" cy="2057400"/>
           </a:xfrm>
           <a:prstGeom prst="roundRect">
             <a:avLst/>
@@ -6176,11 +7395,43 @@
           </a:fontRef>
         </p:style>
         <p:txBody>
-          <a:bodyPr rtlCol="0" anchor="ctr" wrap="square" lIns="274320" rIns="274320" tIns="228600"/>
+          <a:bodyPr rtlCol="0" anchor="ctr" wrap="square" lIns="274320" rIns="274320" tIns="182880"/>
           <a:lstStyle/>
           <a:p>
             <a:pPr algn="ctr">
-              <a:defRPr sz="1000" b="1">
+              <a:defRPr sz="2800" b="1">
+                <a:solidFill>
+                  <a:srgbClr val="2563EB"/>
+                </a:solidFill>
+                <a:latin typeface="Arial"/>
+              </a:defRPr>
+            </a:pPr>
+            <a:r>
+              <a:t>180 000+</a:t>
+            </a:r>
+          </a:p>
+          <a:p>
+            <a:pPr>
+              <a:spcBef>
+                <a:spcPts val="400"/>
+              </a:spcBef>
+              <a:defRPr sz="1300" b="1">
+                <a:solidFill>
+                  <a:srgbClr val="0F172A"/>
+                </a:solidFill>
+                <a:latin typeface="Arial"/>
+              </a:defRPr>
+            </a:pPr>
+            <a:r>
+              <a:t>Выпускников школ в Казахстане ежегодно (TAM)</a:t>
+            </a:r>
+          </a:p>
+          <a:p>
+            <a:pPr>
+              <a:spcBef>
+                <a:spcPts val="400"/>
+              </a:spcBef>
+              <a:defRPr sz="1100">
                 <a:solidFill>
                   <a:srgbClr val="64748B"/>
                 </a:solidFill>
@@ -6188,119 +7439,7 @@
               </a:defRPr>
             </a:pPr>
             <a:r>
-              <a:t>БЕСПЛАТНО</a:t>
-            </a:r>
-          </a:p>
-          <a:p>
-            <a:pPr>
-              <a:spcBef>
-                <a:spcPts val="400"/>
-              </a:spcBef>
-              <a:defRPr sz="2200" b="1">
-                <a:solidFill>
-                  <a:srgbClr val="0F172A"/>
-                </a:solidFill>
-                <a:latin typeface="Arial"/>
-              </a:defRPr>
-            </a:pPr>
-            <a:r>
-              <a:t>0 ₸</a:t>
-            </a:r>
-          </a:p>
-          <a:p>
-            <a:pPr>
-              <a:spcBef>
-                <a:spcPts val="200"/>
-              </a:spcBef>
-              <a:defRPr sz="1500" b="1">
-                <a:solidFill>
-                  <a:srgbClr val="0F172A"/>
-                </a:solidFill>
-                <a:latin typeface="Arial"/>
-              </a:defRPr>
-            </a:pPr>
-            <a:r>
-              <a:t>Freemium Базовый</a:t>
-            </a:r>
-          </a:p>
-          <a:p>
-            <a:pPr>
-              <a:spcBef>
-                <a:spcPts val="400"/>
-              </a:spcBef>
-              <a:defRPr sz="1000">
-                <a:solidFill>
-                  <a:srgbClr val="64748B"/>
-                </a:solidFill>
-                <a:latin typeface="Arial"/>
-              </a:defRPr>
-            </a:pPr>
-            <a:r>
-              <a:t>Охват максимальной аудитории и органический рост:</a:t>
-            </a:r>
-          </a:p>
-          <a:p>
-            <a:pPr>
-              <a:spcBef>
-                <a:spcPts val="600"/>
-              </a:spcBef>
-              <a:defRPr sz="1000">
-                <a:solidFill>
-                  <a:srgbClr val="0F172A"/>
-                </a:solidFill>
-                <a:latin typeface="Arial"/>
-              </a:defRPr>
-            </a:pPr>
-            <a:r>
-              <a:t>• Расчет шансов в топ-36 университетов</a:t>
-            </a:r>
-          </a:p>
-          <a:p>
-            <a:pPr>
-              <a:spcBef>
-                <a:spcPts val="600"/>
-              </a:spcBef>
-              <a:defRPr sz="1000">
-                <a:solidFill>
-                  <a:srgbClr val="0F172A"/>
-                </a:solidFill>
-                <a:latin typeface="Arial"/>
-              </a:defRPr>
-            </a:pPr>
-            <a:r>
-              <a:t>• Анти-иллюзорная классификация</a:t>
-            </a:r>
-          </a:p>
-          <a:p>
-            <a:pPr>
-              <a:spcBef>
-                <a:spcPts val="600"/>
-              </a:spcBef>
-              <a:defRPr sz="1000">
-                <a:solidFill>
-                  <a:srgbClr val="0F172A"/>
-                </a:solidFill>
-                <a:latin typeface="Arial"/>
-              </a:defRPr>
-            </a:pPr>
-            <a:r>
-              <a:t>• Доступ к 3 волнам дедлайнов</a:t>
-            </a:r>
-          </a:p>
-          <a:p>
-            <a:pPr>
-              <a:spcBef>
-                <a:spcPts val="600"/>
-              </a:spcBef>
-              <a:defRPr sz="1000">
-                <a:solidFill>
-                  <a:srgbClr val="0F172A"/>
-                </a:solidFill>
-                <a:latin typeface="Arial"/>
-              </a:defRPr>
-            </a:pPr>
-            <a:r>
-              <a:t>• Базовый роадмап поступления</a:t>
+              <a:t>Ежегодный растущий поток абитуриентов, поступающих в бакалавриат</a:t>
             </a:r>
           </a:p>
         </p:txBody>
@@ -6313,175 +7452,8 @@
         </p:nvSpPr>
         <p:spPr>
           <a:xfrm>
-            <a:off x="4389120" y="1920240"/>
-            <a:ext cx="3383280" cy="4297680"/>
-          </a:xfrm>
-          <a:prstGeom prst="roundRect">
-            <a:avLst/>
-          </a:prstGeom>
-          <a:solidFill>
-            <a:srgbClr val="FFFFFF"/>
-          </a:solidFill>
-          <a:ln>
-            <a:solidFill>
-              <a:srgbClr val="2563EB"/>
-            </a:solidFill>
-          </a:ln>
-        </p:spPr>
-        <p:style>
-          <a:lnRef idx="1">
-            <a:schemeClr val="accent1"/>
-          </a:lnRef>
-          <a:fillRef idx="3">
-            <a:schemeClr val="accent1"/>
-          </a:fillRef>
-          <a:effectRef idx="2">
-            <a:schemeClr val="accent1"/>
-          </a:effectRef>
-          <a:fontRef idx="minor">
-            <a:schemeClr val="lt1"/>
-          </a:fontRef>
-        </p:style>
-        <p:txBody>
-          <a:bodyPr rtlCol="0" anchor="ctr" wrap="square" lIns="274320" rIns="274320" tIns="228600"/>
-          <a:lstStyle/>
-          <a:p>
-            <a:pPr algn="ctr">
-              <a:defRPr sz="1000" b="1">
-                <a:solidFill>
-                  <a:srgbClr val="2563EB"/>
-                </a:solidFill>
-                <a:latin typeface="Arial"/>
-              </a:defRPr>
-            </a:pPr>
-            <a:r>
-              <a:t>ПОПУЛЯРНЫЙ PRO</a:t>
-            </a:r>
-          </a:p>
-          <a:p>
-            <a:pPr>
-              <a:spcBef>
-                <a:spcPts val="400"/>
-              </a:spcBef>
-              <a:defRPr sz="2200" b="1">
-                <a:solidFill>
-                  <a:srgbClr val="0F172A"/>
-                </a:solidFill>
-                <a:latin typeface="Arial"/>
-              </a:defRPr>
-            </a:pPr>
-            <a:r>
-              <a:t>4 990 ₸ / мес</a:t>
-            </a:r>
-          </a:p>
-          <a:p>
-            <a:pPr>
-              <a:spcBef>
-                <a:spcPts val="200"/>
-              </a:spcBef>
-              <a:defRPr sz="1500" b="1">
-                <a:solidFill>
-                  <a:srgbClr val="0F172A"/>
-                </a:solidFill>
-                <a:latin typeface="Arial"/>
-              </a:defRPr>
-            </a:pPr>
-            <a:r>
-              <a:t>AdmitRoute PRO</a:t>
-            </a:r>
-          </a:p>
-          <a:p>
-            <a:pPr>
-              <a:spcBef>
-                <a:spcPts val="400"/>
-              </a:spcBef>
-              <a:defRPr sz="1000">
-                <a:solidFill>
-                  <a:srgbClr val="64748B"/>
-                </a:solidFill>
-                <a:latin typeface="Arial"/>
-              </a:defRPr>
-            </a:pPr>
-            <a:r>
-              <a:t>Для абитуриентов, нацеленных на грант и зарубеж:</a:t>
-            </a:r>
-          </a:p>
-          <a:p>
-            <a:pPr>
-              <a:spcBef>
-                <a:spcPts val="600"/>
-              </a:spcBef>
-              <a:defRPr sz="1000">
-                <a:solidFill>
-                  <a:srgbClr val="0F172A"/>
-                </a:solidFill>
-                <a:latin typeface="Arial"/>
-              </a:defRPr>
-            </a:pPr>
-            <a:r>
-              <a:t>• Безлимитный AI-поиск любого вуза мира</a:t>
-            </a:r>
-          </a:p>
-          <a:p>
-            <a:pPr>
-              <a:spcBef>
-                <a:spcPts val="600"/>
-              </a:spcBef>
-              <a:defRPr sz="1000">
-                <a:solidFill>
-                  <a:srgbClr val="0F172A"/>
-                </a:solidFill>
-                <a:latin typeface="Arial"/>
-              </a:defRPr>
-            </a:pPr>
-            <a:r>
-              <a:t>• Генератор каркаса эссе под требования</a:t>
-            </a:r>
-          </a:p>
-          <a:p>
-            <a:pPr>
-              <a:spcBef>
-                <a:spcPts val="600"/>
-              </a:spcBef>
-              <a:defRPr sz="1000">
-                <a:solidFill>
-                  <a:srgbClr val="0F172A"/>
-                </a:solidFill>
-                <a:latin typeface="Arial"/>
-              </a:defRPr>
-            </a:pPr>
-            <a:r>
-              <a:t>• AI-аудит внеучебного портфолио</a:t>
-            </a:r>
-          </a:p>
-          <a:p>
-            <a:pPr>
-              <a:spcBef>
-                <a:spcPts val="600"/>
-              </a:spcBef>
-              <a:defRPr sz="1000">
-                <a:solidFill>
-                  <a:srgbClr val="0F172A"/>
-                </a:solidFill>
-                <a:latin typeface="Arial"/>
-              </a:defRPr>
-            </a:pPr>
-            <a:r>
-              <a:t>• Персональные пуш-напоминания дедлайнов</a:t>
-            </a:r>
-          </a:p>
-        </p:txBody>
-      </p:sp>
-      <p:sp>
-        <p:nvSpPr>
-          <p:cNvPr id="8" name="Rounded Rectangle 7"/>
-          <p:cNvSpPr/>
-          <p:nvPr/>
-        </p:nvSpPr>
-        <p:spPr>
-          <a:xfrm>
-            <a:off x="8046720" y="1920240"/>
-            <a:ext cx="3383280" cy="4297680"/>
+            <a:off x="6126480" y="1783080"/>
+            <a:ext cx="5120640" cy="2057400"/>
           </a:xfrm>
           <a:prstGeom prst="roundRect">
             <a:avLst/>
@@ -6510,11 +7482,43 @@
           </a:fontRef>
         </p:style>
         <p:txBody>
-          <a:bodyPr rtlCol="0" anchor="ctr" wrap="square" lIns="274320" rIns="274320" tIns="228600"/>
+          <a:bodyPr rtlCol="0" anchor="ctr" wrap="square" lIns="274320" rIns="274320" tIns="182880"/>
           <a:lstStyle/>
           <a:p>
             <a:pPr algn="ctr">
-              <a:defRPr sz="1000" b="1">
+              <a:defRPr sz="2800" b="1">
+                <a:solidFill>
+                  <a:srgbClr val="2563EB"/>
+                </a:solidFill>
+                <a:latin typeface="Arial"/>
+              </a:defRPr>
+            </a:pPr>
+            <a:r>
+              <a:t>35 000+</a:t>
+            </a:r>
+          </a:p>
+          <a:p>
+            <a:pPr>
+              <a:spcBef>
+                <a:spcPts val="400"/>
+              </a:spcBef>
+              <a:defRPr sz="1300" b="1">
+                <a:solidFill>
+                  <a:srgbClr val="0F172A"/>
+                </a:solidFill>
+                <a:latin typeface="Arial"/>
+              </a:defRPr>
+            </a:pPr>
+            <a:r>
+              <a:t>Абитуриентов, поступающих за рубеж (SAM)</a:t>
+            </a:r>
+          </a:p>
+          <a:p>
+            <a:pPr>
+              <a:spcBef>
+                <a:spcPts val="400"/>
+              </a:spcBef>
+              <a:defRPr sz="1100">
                 <a:solidFill>
                   <a:srgbClr val="64748B"/>
                 </a:solidFill>
@@ -6522,7 +7526,62 @@
               </a:defRPr>
             </a:pPr>
             <a:r>
-              <a:t>B2B ПАРТНЕРСТВО</a:t>
+              <a:t>Высокий спрос на обучение в Европе (Италия DSU, Германия), Турции, Азии и США</a:t>
+            </a:r>
+          </a:p>
+        </p:txBody>
+      </p:sp>
+      <p:sp>
+        <p:nvSpPr>
+          <p:cNvPr id="8" name="Rounded Rectangle 7"/>
+          <p:cNvSpPr/>
+          <p:nvPr/>
+        </p:nvSpPr>
+        <p:spPr>
+          <a:xfrm>
+            <a:off x="731520" y="4069080"/>
+            <a:ext cx="5120640" cy="2057400"/>
+          </a:xfrm>
+          <a:prstGeom prst="roundRect">
+            <a:avLst/>
+          </a:prstGeom>
+          <a:solidFill>
+            <a:srgbClr val="FFFFFF"/>
+          </a:solidFill>
+          <a:ln>
+            <a:solidFill>
+              <a:srgbClr val="E2E8F0"/>
+            </a:solidFill>
+          </a:ln>
+        </p:spPr>
+        <p:style>
+          <a:lnRef idx="1">
+            <a:schemeClr val="accent1"/>
+          </a:lnRef>
+          <a:fillRef idx="3">
+            <a:schemeClr val="accent1"/>
+          </a:fillRef>
+          <a:effectRef idx="2">
+            <a:schemeClr val="accent1"/>
+          </a:effectRef>
+          <a:fontRef idx="minor">
+            <a:schemeClr val="lt1"/>
+          </a:fontRef>
+        </p:style>
+        <p:txBody>
+          <a:bodyPr rtlCol="0" anchor="ctr" wrap="square" lIns="274320" rIns="274320" tIns="182880"/>
+          <a:lstStyle/>
+          <a:p>
+            <a:pPr algn="ctr">
+              <a:defRPr sz="2800" b="1">
+                <a:solidFill>
+                  <a:srgbClr val="2563EB"/>
+                </a:solidFill>
+                <a:latin typeface="Arial"/>
+              </a:defRPr>
+            </a:pPr>
+            <a:r>
+              <a:t>75 000+</a:t>
             </a:r>
           </a:p>
           <a:p>
@@ -6530,7 +7589,7 @@
               <a:spcBef>
                 <a:spcPts val="400"/>
               </a:spcBef>
-              <a:defRPr sz="2200" b="1">
+              <a:defRPr sz="1300" b="1">
                 <a:solidFill>
                   <a:srgbClr val="0F172A"/>
                 </a:solidFill>
@@ -6538,15 +7597,86 @@
               </a:defRPr>
             </a:pPr>
             <a:r>
-              <a:t>Индивидуально</a:t>
-            </a:r>
-          </a:p>
-          <a:p>
-            <a:pPr>
-              <a:spcBef>
-                <a:spcPts val="200"/>
-              </a:spcBef>
-              <a:defRPr sz="1500" b="1">
+              <a:t>Государственных грантов РК</a:t>
+            </a:r>
+          </a:p>
+          <a:p>
+            <a:pPr>
+              <a:spcBef>
+                <a:spcPts val="400"/>
+              </a:spcBef>
+              <a:defRPr sz="1100">
+                <a:solidFill>
+                  <a:srgbClr val="64748B"/>
+                </a:solidFill>
+                <a:latin typeface="Arial"/>
+              </a:defRPr>
+            </a:pPr>
+            <a:r>
+              <a:t>Жесткая конкуренция требует точного сопоставления баллов с проходными порогами</a:t>
+            </a:r>
+          </a:p>
+        </p:txBody>
+      </p:sp>
+      <p:sp>
+        <p:nvSpPr>
+          <p:cNvPr id="9" name="Rounded Rectangle 8"/>
+          <p:cNvSpPr/>
+          <p:nvPr/>
+        </p:nvSpPr>
+        <p:spPr>
+          <a:xfrm>
+            <a:off x="6126480" y="4069080"/>
+            <a:ext cx="5120640" cy="2057400"/>
+          </a:xfrm>
+          <a:prstGeom prst="roundRect">
+            <a:avLst/>
+          </a:prstGeom>
+          <a:solidFill>
+            <a:srgbClr val="FFFFFF"/>
+          </a:solidFill>
+          <a:ln>
+            <a:solidFill>
+              <a:srgbClr val="E2E8F0"/>
+            </a:solidFill>
+          </a:ln>
+        </p:spPr>
+        <p:style>
+          <a:lnRef idx="1">
+            <a:schemeClr val="accent1"/>
+          </a:lnRef>
+          <a:fillRef idx="3">
+            <a:schemeClr val="accent1"/>
+          </a:fillRef>
+          <a:effectRef idx="2">
+            <a:schemeClr val="accent1"/>
+          </a:effectRef>
+          <a:fontRef idx="minor">
+            <a:schemeClr val="lt1"/>
+          </a:fontRef>
+        </p:style>
+        <p:txBody>
+          <a:bodyPr rtlCol="0" anchor="ctr" wrap="square" lIns="274320" rIns="274320" tIns="182880"/>
+          <a:lstStyle/>
+          <a:p>
+            <a:pPr algn="ctr">
+              <a:defRPr sz="2800" b="1">
+                <a:solidFill>
+                  <a:srgbClr val="2563EB"/>
+                </a:solidFill>
+                <a:latin typeface="Arial"/>
+              </a:defRPr>
+            </a:pPr>
+            <a:r>
+              <a:t>+38%</a:t>
+            </a:r>
+          </a:p>
+          <a:p>
+            <a:pPr>
+              <a:spcBef>
+                <a:spcPts val="400"/>
+              </a:spcBef>
+              <a:defRPr sz="1300" b="1">
                 <a:solidFill>
                   <a:srgbClr val="0F172A"/>
                 </a:solidFill>
@@ -6554,7 +7684,7 @@
               </a:defRPr>
             </a:pPr>
             <a:r>
-              <a:t>Для школ и центров</a:t>
+              <a:t>Ежегодный рост запросов на гранты и стипендии</a:t>
             </a:r>
           </a:p>
           <a:p>
@@ -6562,7 +7692,7 @@
               <a:spcBef>
                 <a:spcPts val="400"/>
               </a:spcBef>
-              <a:defRPr sz="1000">
+              <a:defRPr sz="1100">
                 <a:solidFill>
                   <a:srgbClr val="64748B"/>
                 </a:solidFill>
@@ -6570,71 +7700,7 @@
               </a:defRPr>
             </a:pPr>
             <a:r>
-              <a:t>Инструмент для образовательных центров и языковых школ:</a:t>
-            </a:r>
-          </a:p>
-          <a:p>
-            <a:pPr>
-              <a:spcBef>
-                <a:spcPts val="600"/>
-              </a:spcBef>
-              <a:defRPr sz="1000">
-                <a:solidFill>
-                  <a:srgbClr val="0F172A"/>
-                </a:solidFill>
-                <a:latin typeface="Arial"/>
-              </a:defRPr>
-            </a:pPr>
-            <a:r>
-              <a:t>• Кабинет консультанта / профориентатора</a:t>
-            </a:r>
-          </a:p>
-          <a:p>
-            <a:pPr>
-              <a:spcBef>
-                <a:spcPts val="600"/>
-              </a:spcBef>
-              <a:defRPr sz="1000">
-                <a:solidFill>
-                  <a:srgbClr val="0F172A"/>
-                </a:solidFill>
-                <a:latin typeface="Arial"/>
-              </a:defRPr>
-            </a:pPr>
-            <a:r>
-              <a:t>• Отслеживание прогресса учеников класса</a:t>
-            </a:r>
-          </a:p>
-          <a:p>
-            <a:pPr>
-              <a:spcBef>
-                <a:spcPts val="600"/>
-              </a:spcBef>
-              <a:defRPr sz="1000">
-                <a:solidFill>
-                  <a:srgbClr val="0F172A"/>
-                </a:solidFill>
-                <a:latin typeface="Arial"/>
-              </a:defRPr>
-            </a:pPr>
-            <a:r>
-              <a:t>• White-label отчеты для родителей</a:t>
-            </a:r>
-          </a:p>
-          <a:p>
-            <a:pPr>
-              <a:spcBef>
-                <a:spcPts val="600"/>
-              </a:spcBef>
-              <a:defRPr sz="1000">
-                <a:solidFill>
-                  <a:srgbClr val="0F172A"/>
-                </a:solidFill>
-                <a:latin typeface="Arial"/>
-              </a:defRPr>
-            </a:pPr>
-            <a:r>
-              <a:t>• API-доступ к аналитической базе</a:t>
+              <a:t>Растущая потребность в программах полного финансирования: DSU, Stipendium, CSC</a:t>
             </a:r>
           </a:p>
         </p:txBody>
@@ -6708,8 +7774,8 @@
         </p:nvSpPr>
         <p:spPr>
           <a:xfrm>
-            <a:off x="731520" y="457200"/>
-            <a:ext cx="10515600" cy="320040"/>
+            <a:off x="731520" y="411480"/>
+            <a:ext cx="10698480" cy="292608"/>
           </a:xfrm>
           <a:prstGeom prst="rect">
             <a:avLst/>
@@ -6731,7 +7797,7 @@
               </a:defRPr>
             </a:pPr>
             <a:r>
-              <a:t>ПЛАНЫ РАЗВИТИЯ</a:t>
+              <a:t>7. БИЗНЕС-МОДЕЛЬ</a:t>
             </a:r>
           </a:p>
         </p:txBody>
@@ -6744,8 +7810,8 @@
         </p:nvSpPr>
         <p:spPr>
           <a:xfrm>
-            <a:off x="731520" y="777240"/>
-            <a:ext cx="10515600" cy="548640"/>
+            <a:off x="731520" y="731520"/>
+            <a:ext cx="10698480" cy="502920"/>
           </a:xfrm>
           <a:prstGeom prst="rect">
             <a:avLst/>
@@ -6759,7 +7825,7 @@
           <a:lstStyle/>
           <a:p>
             <a:pPr>
-              <a:defRPr sz="2400" b="1">
+              <a:defRPr sz="2200" b="1">
                 <a:solidFill>
                   <a:srgbClr val="0F172A"/>
                 </a:solidFill>
@@ -6767,7 +7833,7 @@
               </a:defRPr>
             </a:pPr>
             <a:r>
-              <a:t>Дорожная карта проекта AdmitRoute (2026)</a:t>
+              <a:t>Монетизация: B2C подписка и B2B партнерства</a:t>
             </a:r>
           </a:p>
         </p:txBody>
@@ -6780,8 +7846,8 @@
         </p:nvSpPr>
         <p:spPr>
           <a:xfrm>
-            <a:off x="731520" y="1325880"/>
-            <a:ext cx="10515600" cy="365760"/>
+            <a:off x="731520" y="1261872"/>
+            <a:ext cx="10698480" cy="365760"/>
           </a:xfrm>
           <a:prstGeom prst="rect">
             <a:avLst/>
@@ -6795,7 +7861,7 @@
           <a:lstStyle/>
           <a:p>
             <a:pPr>
-              <a:defRPr sz="1300">
+              <a:defRPr sz="1200">
                 <a:solidFill>
                   <a:srgbClr val="64748B"/>
                 </a:solidFill>
@@ -6803,7 +7869,7 @@
               </a:defRPr>
             </a:pPr>
             <a:r>
-              <a:t>Четкий пошаговый план масштабирования продукта и аудитории.</a:t>
+              <a:t>Прозрачное меню сравнения тарифов Free vs PRO и масштабируемые партнерства со школами.</a:t>
             </a:r>
           </a:p>
         </p:txBody>
@@ -6816,143 +7882,8 @@
         </p:nvSpPr>
         <p:spPr>
           <a:xfrm>
-            <a:off x="731520" y="1920240"/>
-            <a:ext cx="3383280" cy="4297680"/>
-          </a:xfrm>
-          <a:prstGeom prst="roundRect">
-            <a:avLst/>
-          </a:prstGeom>
-          <a:solidFill>
-            <a:srgbClr val="FFFFFF"/>
-          </a:solidFill>
-          <a:ln>
-            <a:solidFill>
-              <a:srgbClr val="10B981"/>
-            </a:solidFill>
-          </a:ln>
-        </p:spPr>
-        <p:style>
-          <a:lnRef idx="1">
-            <a:schemeClr val="accent1"/>
-          </a:lnRef>
-          <a:fillRef idx="3">
-            <a:schemeClr val="accent1"/>
-          </a:fillRef>
-          <a:effectRef idx="2">
-            <a:schemeClr val="accent1"/>
-          </a:effectRef>
-          <a:fontRef idx="minor">
-            <a:schemeClr val="lt1"/>
-          </a:fontRef>
-        </p:style>
-        <p:txBody>
-          <a:bodyPr rtlCol="0" anchor="ctr" wrap="square" lIns="274320" rIns="274320" tIns="274320"/>
-          <a:lstStyle/>
-          <a:p>
-            <a:pPr algn="ctr">
-              <a:defRPr sz="1100" b="1">
-                <a:solidFill>
-                  <a:srgbClr val="10B981"/>
-                </a:solidFill>
-                <a:latin typeface="Arial"/>
-              </a:defRPr>
-            </a:pPr>
-            <a:r>
-              <a:t>Q1 2026 (РЕАЛИЗОВАНО)</a:t>
-            </a:r>
-          </a:p>
-          <a:p>
-            <a:pPr>
-              <a:spcBef>
-                <a:spcPts val="600"/>
-              </a:spcBef>
-              <a:defRPr sz="1700" b="1">
-                <a:solidFill>
-                  <a:srgbClr val="0F172A"/>
-                </a:solidFill>
-                <a:latin typeface="Arial"/>
-              </a:defRPr>
-            </a:pPr>
-            <a:r>
-              <a:t>MVP и AI-движок</a:t>
-            </a:r>
-          </a:p>
-          <a:p>
-            <a:pPr>
-              <a:spcBef>
-                <a:spcPts val="800"/>
-              </a:spcBef>
-              <a:defRPr sz="1100">
-                <a:solidFill>
-                  <a:srgbClr val="0F172A"/>
-                </a:solidFill>
-                <a:latin typeface="Arial"/>
-              </a:defRPr>
-            </a:pPr>
-            <a:r>
-              <a:t>✓ Интерактивная веб-платформа (React/Vite)</a:t>
-            </a:r>
-          </a:p>
-          <a:p>
-            <a:pPr>
-              <a:spcBef>
-                <a:spcPts val="800"/>
-              </a:spcBef>
-              <a:defRPr sz="1100">
-                <a:solidFill>
-                  <a:srgbClr val="0F172A"/>
-                </a:solidFill>
-                <a:latin typeface="Arial"/>
-              </a:defRPr>
-            </a:pPr>
-            <a:r>
-              <a:t>✓ База 36+ детальных программ РК и мира</a:t>
-            </a:r>
-          </a:p>
-          <a:p>
-            <a:pPr>
-              <a:spcBef>
-                <a:spcPts val="800"/>
-              </a:spcBef>
-              <a:defRPr sz="1100">
-                <a:solidFill>
-                  <a:srgbClr val="0F172A"/>
-                </a:solidFill>
-                <a:latin typeface="Arial"/>
-              </a:defRPr>
-            </a:pPr>
-            <a:r>
-              <a:t>✓ Интеграция с Google Gemini 3.6 Flash</a:t>
-            </a:r>
-          </a:p>
-          <a:p>
-            <a:pPr>
-              <a:spcBef>
-                <a:spcPts val="800"/>
-              </a:spcBef>
-              <a:defRPr sz="1100">
-                <a:solidFill>
-                  <a:srgbClr val="0F172A"/>
-                </a:solidFill>
-                <a:latin typeface="Arial"/>
-              </a:defRPr>
-            </a:pPr>
-            <a:r>
-              <a:t>✓ Алгоритм «Анти-иллюзия» и 3 волны дедлайнов</a:t>
-            </a:r>
-          </a:p>
-        </p:txBody>
-      </p:sp>
-      <p:sp>
-        <p:nvSpPr>
-          <p:cNvPr id="7" name="Rounded Rectangle 6"/>
-          <p:cNvSpPr/>
-          <p:nvPr/>
-        </p:nvSpPr>
-        <p:spPr>
-          <a:xfrm>
-            <a:off x="4389120" y="1920240"/>
-            <a:ext cx="3383280" cy="4297680"/>
+            <a:off x="731520" y="1783080"/>
+            <a:ext cx="3383280" cy="4572000"/>
           </a:xfrm>
           <a:prstGeom prst="roundRect">
             <a:avLst/>
@@ -6981,11 +7912,178 @@
           </a:fontRef>
         </p:style>
         <p:txBody>
-          <a:bodyPr rtlCol="0" anchor="ctr" wrap="square" lIns="274320" rIns="274320" tIns="274320"/>
+          <a:bodyPr rtlCol="0" anchor="ctr" wrap="square" lIns="274320" rIns="274320" tIns="228600"/>
           <a:lstStyle/>
           <a:p>
             <a:pPr algn="ctr">
-              <a:defRPr sz="1100" b="1">
+              <a:defRPr sz="1000" b="1">
+                <a:solidFill>
+                  <a:srgbClr val="64748B"/>
+                </a:solidFill>
+                <a:latin typeface="Arial"/>
+              </a:defRPr>
+            </a:pPr>
+            <a:r>
+              <a:t>БЕСПЛАТНО</a:t>
+            </a:r>
+          </a:p>
+          <a:p>
+            <a:pPr>
+              <a:spcBef>
+                <a:spcPts val="400"/>
+              </a:spcBef>
+              <a:defRPr sz="2200" b="1">
+                <a:solidFill>
+                  <a:srgbClr val="0F172A"/>
+                </a:solidFill>
+                <a:latin typeface="Arial"/>
+              </a:defRPr>
+            </a:pPr>
+            <a:r>
+              <a:t>0 ₸</a:t>
+            </a:r>
+          </a:p>
+          <a:p>
+            <a:pPr>
+              <a:spcBef>
+                <a:spcPts val="200"/>
+              </a:spcBef>
+              <a:defRPr sz="1500" b="1">
+                <a:solidFill>
+                  <a:srgbClr val="0F172A"/>
+                </a:solidFill>
+                <a:latin typeface="Arial"/>
+              </a:defRPr>
+            </a:pPr>
+            <a:r>
+              <a:t>Freemium (Базовый)</a:t>
+            </a:r>
+          </a:p>
+          <a:p>
+            <a:pPr>
+              <a:spcBef>
+                <a:spcPts val="400"/>
+              </a:spcBef>
+              <a:defRPr sz="1000">
+                <a:solidFill>
+                  <a:srgbClr val="64748B"/>
+                </a:solidFill>
+                <a:latin typeface="Arial"/>
+              </a:defRPr>
+            </a:pPr>
+            <a:r>
+              <a:t>Максимальный органический охват абитуриентов:</a:t>
+            </a:r>
+          </a:p>
+          <a:p>
+            <a:pPr>
+              <a:spcBef>
+                <a:spcPts val="600"/>
+              </a:spcBef>
+              <a:defRPr sz="1000">
+                <a:solidFill>
+                  <a:srgbClr val="0F172A"/>
+                </a:solidFill>
+                <a:latin typeface="Arial"/>
+              </a:defRPr>
+            </a:pPr>
+            <a:r>
+              <a:t>• Расчет шансов в топ-36 университетов</a:t>
+            </a:r>
+          </a:p>
+          <a:p>
+            <a:pPr>
+              <a:spcBef>
+                <a:spcPts val="600"/>
+              </a:spcBef>
+              <a:defRPr sz="1000">
+                <a:solidFill>
+                  <a:srgbClr val="0F172A"/>
+                </a:solidFill>
+                <a:latin typeface="Arial"/>
+              </a:defRPr>
+            </a:pPr>
+            <a:r>
+              <a:t>• Классификация Safety / Target / Reach</a:t>
+            </a:r>
+          </a:p>
+          <a:p>
+            <a:pPr>
+              <a:spcBef>
+                <a:spcPts val="600"/>
+              </a:spcBef>
+              <a:defRPr sz="1000">
+                <a:solidFill>
+                  <a:srgbClr val="0F172A"/>
+                </a:solidFill>
+                <a:latin typeface="Arial"/>
+              </a:defRPr>
+            </a:pPr>
+            <a:r>
+              <a:t>• Базовый роадмап и 3 волны дедлайнов</a:t>
+            </a:r>
+          </a:p>
+          <a:p>
+            <a:pPr>
+              <a:spcBef>
+                <a:spcPts val="600"/>
+              </a:spcBef>
+              <a:defRPr sz="1000">
+                <a:solidFill>
+                  <a:srgbClr val="0F172A"/>
+                </a:solidFill>
+                <a:latin typeface="Arial"/>
+              </a:defRPr>
+            </a:pPr>
+            <a:r>
+              <a:t>• Лимит: 1 поиск гостю, 6 на Free</a:t>
+            </a:r>
+          </a:p>
+        </p:txBody>
+      </p:sp>
+      <p:sp>
+        <p:nvSpPr>
+          <p:cNvPr id="7" name="Rounded Rectangle 6"/>
+          <p:cNvSpPr/>
+          <p:nvPr/>
+        </p:nvSpPr>
+        <p:spPr>
+          <a:xfrm>
+            <a:off x="4389120" y="1783080"/>
+            <a:ext cx="3383280" cy="4572000"/>
+          </a:xfrm>
+          <a:prstGeom prst="roundRect">
+            <a:avLst/>
+          </a:prstGeom>
+          <a:solidFill>
+            <a:srgbClr val="FFFFFF"/>
+          </a:solidFill>
+          <a:ln>
+            <a:solidFill>
+              <a:srgbClr val="2563EB"/>
+            </a:solidFill>
+          </a:ln>
+        </p:spPr>
+        <p:style>
+          <a:lnRef idx="1">
+            <a:schemeClr val="accent1"/>
+          </a:lnRef>
+          <a:fillRef idx="3">
+            <a:schemeClr val="accent1"/>
+          </a:fillRef>
+          <a:effectRef idx="2">
+            <a:schemeClr val="accent1"/>
+          </a:effectRef>
+          <a:fontRef idx="minor">
+            <a:schemeClr val="lt1"/>
+          </a:fontRef>
+        </p:style>
+        <p:txBody>
+          <a:bodyPr rtlCol="0" anchor="ctr" wrap="square" lIns="274320" rIns="274320" tIns="228600"/>
+          <a:lstStyle/>
+          <a:p>
+            <a:pPr algn="ctr">
+              <a:defRPr sz="1000" b="1">
                 <a:solidFill>
                   <a:srgbClr val="2563EB"/>
                 </a:solidFill>
@@ -6993,7 +8091,55 @@
               </a:defRPr>
             </a:pPr>
             <a:r>
-              <a:t>Q2 2026</a:t>
+              <a:t>ХИТ ПРОДАЖ</a:t>
+            </a:r>
+          </a:p>
+          <a:p>
+            <a:pPr>
+              <a:spcBef>
+                <a:spcPts val="400"/>
+              </a:spcBef>
+              <a:defRPr sz="2200" b="1">
+                <a:solidFill>
+                  <a:srgbClr val="0F172A"/>
+                </a:solidFill>
+                <a:latin typeface="Arial"/>
+              </a:defRPr>
+            </a:pPr>
+            <a:r>
+              <a:t>4 990 ₸ / мес</a:t>
+            </a:r>
+          </a:p>
+          <a:p>
+            <a:pPr>
+              <a:spcBef>
+                <a:spcPts val="200"/>
+              </a:spcBef>
+              <a:defRPr sz="1500" b="1">
+                <a:solidFill>
+                  <a:srgbClr val="0F172A"/>
+                </a:solidFill>
+                <a:latin typeface="Arial"/>
+              </a:defRPr>
+            </a:pPr>
+            <a:r>
+              <a:t>AdmitRoute PRO</a:t>
+            </a:r>
+          </a:p>
+          <a:p>
+            <a:pPr>
+              <a:spcBef>
+                <a:spcPts val="400"/>
+              </a:spcBef>
+              <a:defRPr sz="1000">
+                <a:solidFill>
+                  <a:srgbClr val="64748B"/>
+                </a:solidFill>
+                <a:latin typeface="Arial"/>
+              </a:defRPr>
+            </a:pPr>
+            <a:r>
+              <a:t>Для абитуриентов, нацеленных на гранты и зарубеж:</a:t>
             </a:r>
           </a:p>
           <a:p>
@@ -7001,7 +8147,7 @@
               <a:spcBef>
                 <a:spcPts val="600"/>
               </a:spcBef>
-              <a:defRPr sz="1700" b="1">
+              <a:defRPr sz="1000">
                 <a:solidFill>
                   <a:srgbClr val="0F172A"/>
                 </a:solidFill>
@@ -7009,71 +8155,55 @@
               </a:defRPr>
             </a:pPr>
             <a:r>
-              <a:t>Мобильность и трекинг</a:t>
-            </a:r>
-          </a:p>
-          <a:p>
-            <a:pPr>
-              <a:spcBef>
-                <a:spcPts val="800"/>
-              </a:spcBef>
-              <a:defRPr sz="1100">
-                <a:solidFill>
-                  <a:srgbClr val="64748B"/>
-                </a:solidFill>
-                <a:latin typeface="Arial"/>
-              </a:defRPr>
-            </a:pPr>
-            <a:r>
-              <a:t>→ Адаптивное PWA / Мобильное приложение</a:t>
-            </a:r>
-          </a:p>
-          <a:p>
-            <a:pPr>
-              <a:spcBef>
-                <a:spcPts val="800"/>
-              </a:spcBef>
-              <a:defRPr sz="1100">
-                <a:solidFill>
-                  <a:srgbClr val="64748B"/>
-                </a:solidFill>
-                <a:latin typeface="Arial"/>
-              </a:defRPr>
-            </a:pPr>
-            <a:r>
-              <a:t>→ Telegram-бот с уведомлениями о дедлайнах</a:t>
-            </a:r>
-          </a:p>
-          <a:p>
-            <a:pPr>
-              <a:spcBef>
-                <a:spcPts val="800"/>
-              </a:spcBef>
-              <a:defRPr sz="1100">
-                <a:solidFill>
-                  <a:srgbClr val="64748B"/>
-                </a:solidFill>
-                <a:latin typeface="Arial"/>
-              </a:defRPr>
-            </a:pPr>
-            <a:r>
-              <a:t>→ Расширение базы до 100+ университетов</a:t>
-            </a:r>
-          </a:p>
-          <a:p>
-            <a:pPr>
-              <a:spcBef>
-                <a:spcPts val="800"/>
-              </a:spcBef>
-              <a:defRPr sz="1100">
-                <a:solidFill>
-                  <a:srgbClr val="64748B"/>
-                </a:solidFill>
-                <a:latin typeface="Arial"/>
-              </a:defRPr>
-            </a:pPr>
-            <a:r>
-              <a:t>→ Кабинет загрузки и хранения документов</a:t>
+              <a:t>• Безлимитный AI-поиск любого вуза мира</a:t>
+            </a:r>
+          </a:p>
+          <a:p>
+            <a:pPr>
+              <a:spcBef>
+                <a:spcPts val="600"/>
+              </a:spcBef>
+              <a:defRPr sz="1000">
+                <a:solidFill>
+                  <a:srgbClr val="0F172A"/>
+                </a:solidFill>
+                <a:latin typeface="Arial"/>
+              </a:defRPr>
+            </a:pPr>
+            <a:r>
+              <a:t>• Генератор каркаса эссе (Personal Statement)</a:t>
+            </a:r>
+          </a:p>
+          <a:p>
+            <a:pPr>
+              <a:spcBef>
+                <a:spcPts val="600"/>
+              </a:spcBef>
+              <a:defRPr sz="1000">
+                <a:solidFill>
+                  <a:srgbClr val="0F172A"/>
+                </a:solidFill>
+                <a:latin typeface="Arial"/>
+              </a:defRPr>
+            </a:pPr>
+            <a:r>
+              <a:t>• Глубокий аудит портфолио и активностей</a:t>
+            </a:r>
+          </a:p>
+          <a:p>
+            <a:pPr>
+              <a:spcBef>
+                <a:spcPts val="600"/>
+              </a:spcBef>
+              <a:defRPr sz="1000">
+                <a:solidFill>
+                  <a:srgbClr val="0F172A"/>
+                </a:solidFill>
+                <a:latin typeface="Arial"/>
+              </a:defRPr>
+            </a:pPr>
+            <a:r>
+              <a:t>• Прямой чат с основателем по поступлению</a:t>
             </a:r>
           </a:p>
         </p:txBody>
@@ -7086,8 +8216,8 @@
         </p:nvSpPr>
         <p:spPr>
           <a:xfrm>
-            <a:off x="8046720" y="1920240"/>
-            <a:ext cx="3383280" cy="4297680"/>
+            <a:off x="8046720" y="1783080"/>
+            <a:ext cx="3383280" cy="4572000"/>
           </a:xfrm>
           <a:prstGeom prst="roundRect">
             <a:avLst/>
@@ -7116,19 +8246,67 @@
           </a:fontRef>
         </p:style>
         <p:txBody>
-          <a:bodyPr rtlCol="0" anchor="ctr" wrap="square" lIns="274320" rIns="274320" tIns="274320"/>
+          <a:bodyPr rtlCol="0" anchor="ctr" wrap="square" lIns="274320" rIns="274320" tIns="228600"/>
           <a:lstStyle/>
           <a:p>
             <a:pPr algn="ctr">
-              <a:defRPr sz="1100" b="1">
-                <a:solidFill>
-                  <a:srgbClr val="2563EB"/>
-                </a:solidFill>
-                <a:latin typeface="Arial"/>
-              </a:defRPr>
-            </a:pPr>
-            <a:r>
-              <a:t>Q3-Q4 2026</a:t>
+              <a:defRPr sz="1000" b="1">
+                <a:solidFill>
+                  <a:srgbClr val="64748B"/>
+                </a:solidFill>
+                <a:latin typeface="Arial"/>
+              </a:defRPr>
+            </a:pPr>
+            <a:r>
+              <a:t>B2B ПАРТНЕРСТВО</a:t>
+            </a:r>
+          </a:p>
+          <a:p>
+            <a:pPr>
+              <a:spcBef>
+                <a:spcPts val="400"/>
+              </a:spcBef>
+              <a:defRPr sz="2200" b="1">
+                <a:solidFill>
+                  <a:srgbClr val="0F172A"/>
+                </a:solidFill>
+                <a:latin typeface="Arial"/>
+              </a:defRPr>
+            </a:pPr>
+            <a:r>
+              <a:t>Индивидуально</a:t>
+            </a:r>
+          </a:p>
+          <a:p>
+            <a:pPr>
+              <a:spcBef>
+                <a:spcPts val="200"/>
+              </a:spcBef>
+              <a:defRPr sz="1500" b="1">
+                <a:solidFill>
+                  <a:srgbClr val="0F172A"/>
+                </a:solidFill>
+                <a:latin typeface="Arial"/>
+              </a:defRPr>
+            </a:pPr>
+            <a:r>
+              <a:t>Для школ и центров</a:t>
+            </a:r>
+          </a:p>
+          <a:p>
+            <a:pPr>
+              <a:spcBef>
+                <a:spcPts val="400"/>
+              </a:spcBef>
+              <a:defRPr sz="1000">
+                <a:solidFill>
+                  <a:srgbClr val="64748B"/>
+                </a:solidFill>
+                <a:latin typeface="Arial"/>
+              </a:defRPr>
+            </a:pPr>
+            <a:r>
+              <a:t>Инструмент для образовательных центров и языковых школ:</a:t>
             </a:r>
           </a:p>
           <a:p>
@@ -7136,7 +8314,7 @@
               <a:spcBef>
                 <a:spcPts val="600"/>
               </a:spcBef>
-              <a:defRPr sz="1700" b="1">
+              <a:defRPr sz="1000">
                 <a:solidFill>
                   <a:srgbClr val="0F172A"/>
                 </a:solidFill>
@@ -7144,71 +8322,55 @@
               </a:defRPr>
             </a:pPr>
             <a:r>
-              <a:t>B2B и масштабирование</a:t>
-            </a:r>
-          </a:p>
-          <a:p>
-            <a:pPr>
-              <a:spcBef>
-                <a:spcPts val="800"/>
-              </a:spcBef>
-              <a:defRPr sz="1100">
-                <a:solidFill>
-                  <a:srgbClr val="64748B"/>
-                </a:solidFill>
-                <a:latin typeface="Arial"/>
-              </a:defRPr>
-            </a:pPr>
-            <a:r>
-              <a:t>→ B2B-панель для школ и репетиторов</a:t>
-            </a:r>
-          </a:p>
-          <a:p>
-            <a:pPr>
-              <a:spcBef>
-                <a:spcPts val="800"/>
-              </a:spcBef>
-              <a:defRPr sz="1100">
-                <a:solidFill>
-                  <a:srgbClr val="64748B"/>
-                </a:solidFill>
-                <a:latin typeface="Arial"/>
-              </a:defRPr>
-            </a:pPr>
-            <a:r>
-              <a:t>→ AI-тренажер собеседований приемной комиссии</a:t>
-            </a:r>
-          </a:p>
-          <a:p>
-            <a:pPr>
-              <a:spcBef>
-                <a:spcPts val="800"/>
-              </a:spcBef>
-              <a:defRPr sz="1100">
-                <a:solidFill>
-                  <a:srgbClr val="64748B"/>
-                </a:solidFill>
-                <a:latin typeface="Arial"/>
-              </a:defRPr>
-            </a:pPr>
-            <a:r>
-              <a:t>→ Выход на рынки Узбекистана и Кыргызстана</a:t>
-            </a:r>
-          </a:p>
-          <a:p>
-            <a:pPr>
-              <a:spcBef>
-                <a:spcPts val="800"/>
-              </a:spcBef>
-              <a:defRPr sz="1100">
-                <a:solidFill>
-                  <a:srgbClr val="64748B"/>
-                </a:solidFill>
-                <a:latin typeface="Arial"/>
-              </a:defRPr>
-            </a:pPr>
-            <a:r>
-              <a:t>→ Прямая интеграция с подачей заявок в вузы</a:t>
+              <a:t>• Кабинет консультанта и профориентатора</a:t>
+            </a:r>
+          </a:p>
+          <a:p>
+            <a:pPr>
+              <a:spcBef>
+                <a:spcPts val="600"/>
+              </a:spcBef>
+              <a:defRPr sz="1000">
+                <a:solidFill>
+                  <a:srgbClr val="0F172A"/>
+                </a:solidFill>
+                <a:latin typeface="Arial"/>
+              </a:defRPr>
+            </a:pPr>
+            <a:r>
+              <a:t>• Отслеживание дедлайнов учеников класса</a:t>
+            </a:r>
+          </a:p>
+          <a:p>
+            <a:pPr>
+              <a:spcBef>
+                <a:spcPts val="600"/>
+              </a:spcBef>
+              <a:defRPr sz="1000">
+                <a:solidFill>
+                  <a:srgbClr val="0F172A"/>
+                </a:solidFill>
+                <a:latin typeface="Arial"/>
+              </a:defRPr>
+            </a:pPr>
+            <a:r>
+              <a:t>• White-label отчеты для родителей</a:t>
+            </a:r>
+          </a:p>
+          <a:p>
+            <a:pPr>
+              <a:spcBef>
+                <a:spcPts val="600"/>
+              </a:spcBef>
+              <a:defRPr sz="1000">
+                <a:solidFill>
+                  <a:srgbClr val="0F172A"/>
+                </a:solidFill>
+                <a:latin typeface="Arial"/>
+              </a:defRPr>
+            </a:pPr>
+            <a:r>
+              <a:t>• Пакетные скидки на подписки PRO</a:t>
             </a:r>
           </a:p>
         </p:txBody>
@@ -7246,7 +8408,7 @@
             <a:avLst/>
           </a:prstGeom>
           <a:solidFill>
-            <a:srgbClr val="0F172A"/>
+            <a:srgbClr val="F8FAFC"/>
           </a:solidFill>
           <a:ln>
             <a:noFill/>
@@ -7274,40 +8436,16 @@
           </a:p>
         </p:txBody>
       </p:sp>
-      <p:pic>
-        <p:nvPicPr>
-          <p:cNvPr id="3" name="Picture 2" descr="admitroute_line_logo_1789549104894.jpg"/>
-          <p:cNvPicPr>
-            <a:picLocks noChangeAspect="1"/>
-          </p:cNvPicPr>
-          <p:nvPr/>
-        </p:nvPicPr>
-        <p:blipFill>
-          <a:blip r:embed="rId2"/>
-          <a:stretch>
-            <a:fillRect/>
-          </a:stretch>
-        </p:blipFill>
-        <p:spPr>
-          <a:xfrm>
-            <a:off x="822960" y="914400"/>
-            <a:ext cx="1463040" cy="1463040"/>
-          </a:xfrm>
-          <a:prstGeom prst="rect">
-            <a:avLst/>
-          </a:prstGeom>
-        </p:spPr>
-      </p:pic>
-      <p:sp>
-        <p:nvSpPr>
-          <p:cNvPr id="4" name="TextBox 3"/>
+      <p:sp>
+        <p:nvSpPr>
+          <p:cNvPr id="3" name="TextBox 2"/>
           <p:cNvSpPr txBox="1"/>
           <p:nvPr/>
         </p:nvSpPr>
         <p:spPr>
           <a:xfrm>
-            <a:off x="822960" y="2468880"/>
-            <a:ext cx="10515600" cy="2011680"/>
+            <a:off x="731520" y="411480"/>
+            <a:ext cx="10698480" cy="292608"/>
           </a:xfrm>
           <a:prstGeom prst="rect">
             <a:avLst/>
@@ -7315,61 +8453,117 @@
           <a:noFill/>
         </p:spPr>
         <p:txBody>
-          <a:bodyPr wrap="square">
+          <a:bodyPr wrap="square" lIns="0" tIns="0" rIns="0" bIns="0">
             <a:spAutoFit/>
           </a:bodyPr>
           <a:lstStyle/>
           <a:p>
             <a:pPr>
-              <a:defRPr sz="4000" b="1">
-                <a:solidFill>
-                  <a:srgbClr val="FFFFFF"/>
-                </a:solidFill>
-                <a:latin typeface="Arial"/>
-              </a:defRPr>
-            </a:pPr>
-            <a:r>
-              <a:t>Поступление без стресса и иллюзий</a:t>
-            </a:r>
-          </a:p>
-          <a:p>
-            <a:pPr>
-              <a:spcBef>
-                <a:spcPts val="1200"/>
-              </a:spcBef>
-              <a:defRPr sz="1600">
-                <a:solidFill>
-                  <a:srgbClr val="94A3B8"/>
-                </a:solidFill>
-                <a:latin typeface="Arial"/>
-              </a:defRPr>
-            </a:pPr>
-            <a:r>
-              <a:t>AdmitRoute помогает каждому абитуриенту найти свой идеальный университет и грант на основе реальных данных, а не пустых обещаний.</a:t>
-            </a:r>
-          </a:p>
-        </p:txBody>
-      </p:sp>
-      <p:sp>
-        <p:nvSpPr>
-          <p:cNvPr id="5" name="Rounded Rectangle 4"/>
+              <a:defRPr sz="1100" b="1">
+                <a:solidFill>
+                  <a:srgbClr val="2563EB"/>
+                </a:solidFill>
+                <a:latin typeface="Arial"/>
+              </a:defRPr>
+            </a:pPr>
+            <a:r>
+              <a:t>8. ТЕХНОЛОГИИ</a:t>
+            </a:r>
+          </a:p>
+        </p:txBody>
+      </p:sp>
+      <p:sp>
+        <p:nvSpPr>
+          <p:cNvPr id="4" name="TextBox 3"/>
+          <p:cNvSpPr txBox="1"/>
+          <p:nvPr/>
+        </p:nvSpPr>
+        <p:spPr>
+          <a:xfrm>
+            <a:off x="731520" y="731520"/>
+            <a:ext cx="10698480" cy="502920"/>
+          </a:xfrm>
+          <a:prstGeom prst="rect">
+            <a:avLst/>
+          </a:prstGeom>
+          <a:noFill/>
+        </p:spPr>
+        <p:txBody>
+          <a:bodyPr wrap="square" lIns="0" tIns="0" rIns="0" bIns="0">
+            <a:spAutoFit/>
+          </a:bodyPr>
+          <a:lstStyle/>
+          <a:p>
+            <a:pPr>
+              <a:defRPr sz="2200" b="1">
+                <a:solidFill>
+                  <a:srgbClr val="0F172A"/>
+                </a:solidFill>
+                <a:latin typeface="Arial"/>
+              </a:defRPr>
+            </a:pPr>
+            <a:r>
+              <a:t>Архитектура решения и технологический стек платформы</a:t>
+            </a:r>
+          </a:p>
+        </p:txBody>
+      </p:sp>
+      <p:sp>
+        <p:nvSpPr>
+          <p:cNvPr id="5" name="TextBox 4"/>
+          <p:cNvSpPr txBox="1"/>
+          <p:nvPr/>
+        </p:nvSpPr>
+        <p:spPr>
+          <a:xfrm>
+            <a:off x="731520" y="1261872"/>
+            <a:ext cx="10698480" cy="365760"/>
+          </a:xfrm>
+          <a:prstGeom prst="rect">
+            <a:avLst/>
+          </a:prstGeom>
+          <a:noFill/>
+        </p:spPr>
+        <p:txBody>
+          <a:bodyPr wrap="square" lIns="0" tIns="0" rIns="0" bIns="0">
+            <a:spAutoFit/>
+          </a:bodyPr>
+          <a:lstStyle/>
+          <a:p>
+            <a:pPr>
+              <a:defRPr sz="1200">
+                <a:solidFill>
+                  <a:srgbClr val="64748B"/>
+                </a:solidFill>
+                <a:latin typeface="Arial"/>
+              </a:defRPr>
+            </a:pPr>
+            <a:r>
+              <a:t>Отказоустойчивая архитектура: сверхбыстрый AI-инференс, глобальная БД и Telegram-автоматизация.</a:t>
+            </a:r>
+          </a:p>
+        </p:txBody>
+      </p:sp>
+      <p:sp>
+        <p:nvSpPr>
+          <p:cNvPr id="6" name="Rounded Rectangle 5"/>
           <p:cNvSpPr/>
           <p:nvPr/>
         </p:nvSpPr>
         <p:spPr>
           <a:xfrm>
-            <a:off x="822960" y="4663440"/>
-            <a:ext cx="3383280" cy="1371600"/>
+            <a:off x="731520" y="1783080"/>
+            <a:ext cx="5120640" cy="2057400"/>
           </a:xfrm>
           <a:prstGeom prst="roundRect">
             <a:avLst/>
           </a:prstGeom>
           <a:solidFill>
-            <a:srgbClr val="1E293B"/>
+            <a:srgbClr val="FFFFFF"/>
           </a:solidFill>
           <a:ln>
             <a:solidFill>
-              <a:srgbClr val="334155"/>
+              <a:srgbClr val="E2E8F0"/>
             </a:solidFill>
           </a:ln>
         </p:spPr>
@@ -7388,59 +8582,75 @@
           </a:fontRef>
         </p:style>
         <p:txBody>
-          <a:bodyPr rtlCol="0" anchor="ctr" wrap="square" lIns="228600" rIns="228600" tIns="182880"/>
+          <a:bodyPr rtlCol="0" anchor="ctr" wrap="square" lIns="274320" rIns="274320" tIns="182880"/>
           <a:lstStyle/>
           <a:p>
             <a:pPr algn="ctr">
               <a:defRPr sz="1000" b="1">
                 <a:solidFill>
-                  <a:srgbClr val="38BDF8"/>
-                </a:solidFill>
-                <a:latin typeface="Arial"/>
-              </a:defRPr>
-            </a:pPr>
-            <a:r>
-              <a:t>ДЕМО ВЕБ-САЙТА</a:t>
-            </a:r>
-          </a:p>
-          <a:p>
-            <a:pPr>
-              <a:spcBef>
-                <a:spcPts val="600"/>
-              </a:spcBef>
-              <a:defRPr sz="1300" b="1">
-                <a:solidFill>
-                  <a:srgbClr val="FFFFFF"/>
-                </a:solidFill>
-                <a:latin typeface="Arial"/>
-              </a:defRPr>
-            </a:pPr>
-            <a:r>
-              <a:t>http://localhost:5173/</a:t>
-            </a:r>
-          </a:p>
-        </p:txBody>
-      </p:sp>
-      <p:sp>
-        <p:nvSpPr>
-          <p:cNvPr id="6" name="Rounded Rectangle 5"/>
+                  <a:srgbClr val="7C3AED"/>
+                </a:solidFill>
+                <a:latin typeface="Arial"/>
+              </a:defRPr>
+            </a:pPr>
+            <a:r>
+              <a:t>ИСКУССТВЕННЫЙ ИНТЕЛЛЕКТ</a:t>
+            </a:r>
+          </a:p>
+          <a:p>
+            <a:pPr>
+              <a:spcBef>
+                <a:spcPts val="400"/>
+              </a:spcBef>
+              <a:defRPr sz="1500" b="1">
+                <a:solidFill>
+                  <a:srgbClr val="0F172A"/>
+                </a:solidFill>
+                <a:latin typeface="Arial"/>
+              </a:defRPr>
+            </a:pPr>
+            <a:r>
+              <a:t>Google Gemini 3.6 Flash + Grounded Base</a:t>
+            </a:r>
+          </a:p>
+          <a:p>
+            <a:pPr>
+              <a:spcBef>
+                <a:spcPts val="400"/>
+              </a:spcBef>
+              <a:defRPr sz="1100">
+                <a:solidFill>
+                  <a:srgbClr val="64748B"/>
+                </a:solidFill>
+                <a:latin typeface="Arial"/>
+              </a:defRPr>
+            </a:pPr>
+            <a:r>
+              <a:t>Связка новейшего API Gemini 3.6 Flash с верифицированной базой программ (130+ направлений): точные пороги ЕНТ, IELTS, реальные гранты и стоимость без галлюцинаций.</a:t>
+            </a:r>
+          </a:p>
+        </p:txBody>
+      </p:sp>
+      <p:sp>
+        <p:nvSpPr>
+          <p:cNvPr id="7" name="Rounded Rectangle 6"/>
           <p:cNvSpPr/>
           <p:nvPr/>
         </p:nvSpPr>
         <p:spPr>
           <a:xfrm>
-            <a:off x="4480560" y="4663440"/>
-            <a:ext cx="3383280" cy="1371600"/>
+            <a:off x="6126480" y="1783080"/>
+            <a:ext cx="5120640" cy="2057400"/>
           </a:xfrm>
           <a:prstGeom prst="roundRect">
             <a:avLst/>
           </a:prstGeom>
           <a:solidFill>
-            <a:srgbClr val="1E293B"/>
+            <a:srgbClr val="FFFFFF"/>
           </a:solidFill>
           <a:ln>
             <a:solidFill>
-              <a:srgbClr val="334155"/>
+              <a:srgbClr val="E2E8F0"/>
             </a:solidFill>
           </a:ln>
         </p:spPr>
@@ -7459,59 +8669,75 @@
           </a:fontRef>
         </p:style>
         <p:txBody>
-          <a:bodyPr rtlCol="0" anchor="ctr" wrap="square" lIns="228600" rIns="228600" tIns="182880"/>
+          <a:bodyPr rtlCol="0" anchor="ctr" wrap="square" lIns="274320" rIns="274320" tIns="182880"/>
           <a:lstStyle/>
           <a:p>
             <a:pPr algn="ctr">
               <a:defRPr sz="1000" b="1">
                 <a:solidFill>
-                  <a:srgbClr val="38BDF8"/>
-                </a:solidFill>
-                <a:latin typeface="Arial"/>
-              </a:defRPr>
-            </a:pPr>
-            <a:r>
-              <a:t>ТЕХНОЛОГИЧЕСКИЙ СТЕК</a:t>
-            </a:r>
-          </a:p>
-          <a:p>
-            <a:pPr>
-              <a:spcBef>
-                <a:spcPts val="600"/>
-              </a:spcBef>
-              <a:defRPr sz="1300" b="1">
-                <a:solidFill>
-                  <a:srgbClr val="FFFFFF"/>
-                </a:solidFill>
-                <a:latin typeface="Arial"/>
-              </a:defRPr>
-            </a:pPr>
-            <a:r>
-              <a:t>React 19, Vite, Gemini 3.6 Flash</a:t>
-            </a:r>
-          </a:p>
-        </p:txBody>
-      </p:sp>
-      <p:sp>
-        <p:nvSpPr>
-          <p:cNvPr id="7" name="Rounded Rectangle 6"/>
+                  <a:srgbClr val="2563EB"/>
+                </a:solidFill>
+                <a:latin typeface="Arial"/>
+              </a:defRPr>
+            </a:pPr>
+            <a:r>
+              <a:t>ОБЛАЧНАЯ БАЗА ДАННЫХ</a:t>
+            </a:r>
+          </a:p>
+          <a:p>
+            <a:pPr>
+              <a:spcBef>
+                <a:spcPts val="400"/>
+              </a:spcBef>
+              <a:defRPr sz="1500" b="1">
+                <a:solidFill>
+                  <a:srgbClr val="0F172A"/>
+                </a:solidFill>
+                <a:latin typeface="Arial"/>
+              </a:defRPr>
+            </a:pPr>
+            <a:r>
+              <a:t>Neon Serverless PostgreSQL (AWS us-east-2)</a:t>
+            </a:r>
+          </a:p>
+          <a:p>
+            <a:pPr>
+              <a:spcBef>
+                <a:spcPts val="400"/>
+              </a:spcBef>
+              <a:defRPr sz="1100">
+                <a:solidFill>
+                  <a:srgbClr val="64748B"/>
+                </a:solidFill>
+                <a:latin typeface="Arial"/>
+              </a:defRPr>
+            </a:pPr>
+            <a:r>
+              <a:t>Бессерверная реляционная БД с мгновенным масштабированием и RLS-безопасностью. Централизованное хранение профилей, Live-чата и трекеров с отказоустойчивой синхронизацией.</a:t>
+            </a:r>
+          </a:p>
+        </p:txBody>
+      </p:sp>
+      <p:sp>
+        <p:nvSpPr>
+          <p:cNvPr id="8" name="Rounded Rectangle 7"/>
           <p:cNvSpPr/>
           <p:nvPr/>
         </p:nvSpPr>
         <p:spPr>
           <a:xfrm>
-            <a:off x="8138160" y="4663440"/>
-            <a:ext cx="3383280" cy="1371600"/>
+            <a:off x="731520" y="4069080"/>
+            <a:ext cx="5120640" cy="2057400"/>
           </a:xfrm>
           <a:prstGeom prst="roundRect">
             <a:avLst/>
           </a:prstGeom>
           <a:solidFill>
-            <a:srgbClr val="1E293B"/>
+            <a:srgbClr val="FFFFFF"/>
           </a:solidFill>
           <a:ln>
             <a:solidFill>
-              <a:srgbClr val="334155"/>
+              <a:srgbClr val="E2E8F0"/>
             </a:solidFill>
           </a:ln>
         </p:spPr>
@@ -7530,35 +8756,138 @@
           </a:fontRef>
         </p:style>
         <p:txBody>
-          <a:bodyPr rtlCol="0" anchor="ctr" wrap="square" lIns="228600" rIns="228600" tIns="182880"/>
+          <a:bodyPr rtlCol="0" anchor="ctr" wrap="square" lIns="274320" rIns="274320" tIns="182880"/>
           <a:lstStyle/>
           <a:p>
             <a:pPr algn="ctr">
               <a:defRPr sz="1000" b="1">
                 <a:solidFill>
-                  <a:srgbClr val="38BDF8"/>
-                </a:solidFill>
-                <a:latin typeface="Arial"/>
-              </a:defRPr>
-            </a:pPr>
-            <a:r>
-              <a:t>ПРОЕКТ И КОД</a:t>
-            </a:r>
-          </a:p>
-          <a:p>
-            <a:pPr>
-              <a:spcBef>
-                <a:spcPts val="600"/>
-              </a:spcBef>
-              <a:defRPr sz="1300" b="1">
-                <a:solidFill>
-                  <a:srgbClr val="FFFFFF"/>
-                </a:solidFill>
-                <a:latin typeface="Arial"/>
-              </a:defRPr>
-            </a:pPr>
-            <a:r>
-              <a:t>C:\Users\Адильхан\Documents\admitroute</a:t>
+                  <a:srgbClr val="2563EB"/>
+                </a:solidFill>
+                <a:latin typeface="Arial"/>
+              </a:defRPr>
+            </a:pPr>
+            <a:r>
+              <a:t>СОВРЕМЕННЫЙ ФРОНТЕНД</a:t>
+            </a:r>
+          </a:p>
+          <a:p>
+            <a:pPr>
+              <a:spcBef>
+                <a:spcPts val="400"/>
+              </a:spcBef>
+              <a:defRPr sz="1500" b="1">
+                <a:solidFill>
+                  <a:srgbClr val="0F172A"/>
+                </a:solidFill>
+                <a:latin typeface="Arial"/>
+              </a:defRPr>
+            </a:pPr>
+            <a:r>
+              <a:t>React 19 • TypeScript • Vite • Tailwind</a:t>
+            </a:r>
+          </a:p>
+          <a:p>
+            <a:pPr>
+              <a:spcBef>
+                <a:spcPts val="400"/>
+              </a:spcBef>
+              <a:defRPr sz="1100">
+                <a:solidFill>
+                  <a:srgbClr val="64748B"/>
+                </a:solidFill>
+                <a:latin typeface="Arial"/>
+              </a:defRPr>
+            </a:pPr>
+            <a:r>
+              <a:t>Мгновенная скорость работы (отклик &lt;0.2 сек), строгая типизация, полная адаптивность под мобильные устройства и экспорт персональных дедлайнов в формат .ics (iCalendar).</a:t>
+            </a:r>
+          </a:p>
+        </p:txBody>
+      </p:sp>
+      <p:sp>
+        <p:nvSpPr>
+          <p:cNvPr id="9" name="Rounded Rectangle 8"/>
+          <p:cNvSpPr/>
+          <p:nvPr/>
+        </p:nvSpPr>
+        <p:spPr>
+          <a:xfrm>
+            <a:off x="6126480" y="4069080"/>
+            <a:ext cx="5120640" cy="2057400"/>
+          </a:xfrm>
+          <a:prstGeom prst="roundRect">
+            <a:avLst/>
+          </a:prstGeom>
+          <a:solidFill>
+            <a:srgbClr val="FFFFFF"/>
+          </a:solidFill>
+          <a:ln>
+            <a:solidFill>
+              <a:srgbClr val="E2E8F0"/>
+            </a:solidFill>
+          </a:ln>
+        </p:spPr>
+        <p:style>
+          <a:lnRef idx="1">
+            <a:schemeClr val="accent1"/>
+          </a:lnRef>
+          <a:fillRef idx="3">
+            <a:schemeClr val="accent1"/>
+          </a:fillRef>
+          <a:effectRef idx="2">
+            <a:schemeClr val="accent1"/>
+          </a:effectRef>
+          <a:fontRef idx="minor">
+            <a:schemeClr val="lt1"/>
+          </a:fontRef>
+        </p:style>
+        <p:txBody>
+          <a:bodyPr rtlCol="0" anchor="ctr" wrap="square" lIns="274320" rIns="274320" tIns="182880"/>
+          <a:lstStyle/>
+          <a:p>
+            <a:pPr algn="ctr">
+              <a:defRPr sz="1000" b="1">
+                <a:solidFill>
+                  <a:srgbClr val="2563EB"/>
+                </a:solidFill>
+                <a:latin typeface="Arial"/>
+              </a:defRPr>
+            </a:pPr>
+            <a:r>
+              <a:t>ФОНОВАЯ АВТОМАТИЗАЦИЯ</a:t>
+            </a:r>
+          </a:p>
+          <a:p>
+            <a:pPr>
+              <a:spcBef>
+                <a:spcPts val="400"/>
+              </a:spcBef>
+              <a:defRPr sz="1500" b="1">
+                <a:solidFill>
+                  <a:srgbClr val="0F172A"/>
+                </a:solidFill>
+                <a:latin typeface="Arial"/>
+              </a:defRPr>
+            </a:pPr>
+            <a:r>
+              <a:t>Telegram Bot Webhooks • Vercel Cron</a:t>
+            </a:r>
+          </a:p>
+          <a:p>
+            <a:pPr>
+              <a:spcBef>
+                <a:spcPts val="400"/>
+              </a:spcBef>
+              <a:defRPr sz="1100">
+                <a:solidFill>
+                  <a:srgbClr val="64748B"/>
+                </a:solidFill>
+                <a:latin typeface="Arial"/>
+              </a:defRPr>
+            </a:pPr>
+            <a:r>
+              <a:t>Serverless-архитектура без постоянных расходов: мгновенная обработка команд в Telegram через Webhook и автоматические напоминания о дедлайнах за 14, 7, 3 и 1 день.</a:t>
             </a:r>
           </a:p>
         </p:txBody>
